--- a/presentaion/World Development Statistics.pptx
+++ b/presentaion/World Development Statistics.pptx
@@ -928,6 +928,2982 @@
 </pc:chgInfo>
 </file>
 
+<file path=ppt/diagrams/colors1.xml><?xml version="1.0" encoding="utf-8"?>
+<dgm:colorsDef xmlns:dgm="http://schemas.openxmlformats.org/drawingml/2006/diagram" xmlns:a="http://schemas.openxmlformats.org/drawingml/2006/main" uniqueId="urn:microsoft.com/office/officeart/2005/8/colors/accent0_2">
+  <dgm:title val=""/>
+  <dgm:desc val=""/>
+  <dgm:catLst>
+    <dgm:cat type="mainScheme" pri="10200"/>
+  </dgm:catLst>
+  <dgm:styleLbl name="node0">
+    <dgm:fillClrLst meth="repeat">
+      <a:schemeClr val="lt1"/>
+    </dgm:fillClrLst>
+    <dgm:linClrLst meth="repeat">
+      <a:schemeClr val="dk2">
+        <a:shade val="80000"/>
+      </a:schemeClr>
+    </dgm:linClrLst>
+    <dgm:effectClrLst/>
+    <dgm:txLinClrLst/>
+    <dgm:txFillClrLst meth="repeat">
+      <a:schemeClr val="dk2"/>
+    </dgm:txFillClrLst>
+    <dgm:txEffectClrLst/>
+  </dgm:styleLbl>
+  <dgm:styleLbl name="node1">
+    <dgm:fillClrLst meth="repeat">
+      <a:schemeClr val="lt1"/>
+    </dgm:fillClrLst>
+    <dgm:linClrLst meth="repeat">
+      <a:schemeClr val="dk2">
+        <a:shade val="80000"/>
+      </a:schemeClr>
+    </dgm:linClrLst>
+    <dgm:effectClrLst/>
+    <dgm:txLinClrLst/>
+    <dgm:txFillClrLst meth="repeat">
+      <a:schemeClr val="dk2"/>
+    </dgm:txFillClrLst>
+    <dgm:txEffectClrLst/>
+  </dgm:styleLbl>
+  <dgm:styleLbl name="alignNode1">
+    <dgm:fillClrLst meth="repeat">
+      <a:schemeClr val="lt1"/>
+    </dgm:fillClrLst>
+    <dgm:linClrLst meth="repeat">
+      <a:schemeClr val="dk2">
+        <a:shade val="80000"/>
+      </a:schemeClr>
+    </dgm:linClrLst>
+    <dgm:effectClrLst/>
+    <dgm:txLinClrLst/>
+    <dgm:txFillClrLst meth="repeat">
+      <a:schemeClr val="dk2"/>
+    </dgm:txFillClrLst>
+    <dgm:txEffectClrLst/>
+  </dgm:styleLbl>
+  <dgm:styleLbl name="lnNode1">
+    <dgm:fillClrLst meth="repeat">
+      <a:schemeClr val="lt1"/>
+    </dgm:fillClrLst>
+    <dgm:linClrLst meth="repeat">
+      <a:schemeClr val="dk2">
+        <a:shade val="80000"/>
+      </a:schemeClr>
+    </dgm:linClrLst>
+    <dgm:effectClrLst/>
+    <dgm:txLinClrLst/>
+    <dgm:txFillClrLst meth="repeat">
+      <a:schemeClr val="dk2"/>
+    </dgm:txFillClrLst>
+    <dgm:txEffectClrLst/>
+  </dgm:styleLbl>
+  <dgm:styleLbl name="vennNode1">
+    <dgm:fillClrLst meth="repeat">
+      <a:schemeClr val="lt1">
+        <a:alpha val="50000"/>
+      </a:schemeClr>
+    </dgm:fillClrLst>
+    <dgm:linClrLst meth="repeat">
+      <a:schemeClr val="dk2">
+        <a:shade val="80000"/>
+      </a:schemeClr>
+    </dgm:linClrLst>
+    <dgm:effectClrLst/>
+    <dgm:txLinClrLst/>
+    <dgm:txFillClrLst/>
+    <dgm:txEffectClrLst/>
+  </dgm:styleLbl>
+  <dgm:styleLbl name="node2">
+    <dgm:fillClrLst meth="repeat">
+      <a:schemeClr val="lt1"/>
+    </dgm:fillClrLst>
+    <dgm:linClrLst meth="repeat">
+      <a:schemeClr val="dk2">
+        <a:shade val="80000"/>
+      </a:schemeClr>
+    </dgm:linClrLst>
+    <dgm:effectClrLst/>
+    <dgm:txLinClrLst/>
+    <dgm:txFillClrLst meth="repeat">
+      <a:schemeClr val="dk2"/>
+    </dgm:txFillClrLst>
+    <dgm:txEffectClrLst/>
+  </dgm:styleLbl>
+  <dgm:styleLbl name="node3">
+    <dgm:fillClrLst meth="repeat">
+      <a:schemeClr val="lt1"/>
+    </dgm:fillClrLst>
+    <dgm:linClrLst meth="repeat">
+      <a:schemeClr val="dk2">
+        <a:shade val="80000"/>
+      </a:schemeClr>
+    </dgm:linClrLst>
+    <dgm:effectClrLst/>
+    <dgm:txLinClrLst/>
+    <dgm:txFillClrLst meth="repeat">
+      <a:schemeClr val="dk2"/>
+    </dgm:txFillClrLst>
+    <dgm:txEffectClrLst/>
+  </dgm:styleLbl>
+  <dgm:styleLbl name="node4">
+    <dgm:fillClrLst meth="repeat">
+      <a:schemeClr val="lt1"/>
+    </dgm:fillClrLst>
+    <dgm:linClrLst meth="repeat">
+      <a:schemeClr val="dk2">
+        <a:shade val="80000"/>
+      </a:schemeClr>
+    </dgm:linClrLst>
+    <dgm:effectClrLst/>
+    <dgm:txLinClrLst/>
+    <dgm:txFillClrLst meth="repeat">
+      <a:schemeClr val="dk2"/>
+    </dgm:txFillClrLst>
+    <dgm:txEffectClrLst/>
+  </dgm:styleLbl>
+  <dgm:styleLbl name="fgImgPlace1">
+    <dgm:fillClrLst meth="repeat">
+      <a:schemeClr val="dk2">
+        <a:tint val="40000"/>
+      </a:schemeClr>
+    </dgm:fillClrLst>
+    <dgm:linClrLst meth="repeat">
+      <a:schemeClr val="dk2">
+        <a:shade val="80000"/>
+      </a:schemeClr>
+    </dgm:linClrLst>
+    <dgm:effectClrLst/>
+    <dgm:txLinClrLst/>
+    <dgm:txFillClrLst meth="repeat">
+      <a:schemeClr val="lt1"/>
+    </dgm:txFillClrLst>
+    <dgm:txEffectClrLst/>
+  </dgm:styleLbl>
+  <dgm:styleLbl name="alignImgPlace1">
+    <dgm:fillClrLst meth="repeat">
+      <a:schemeClr val="dk2">
+        <a:tint val="40000"/>
+      </a:schemeClr>
+    </dgm:fillClrLst>
+    <dgm:linClrLst meth="repeat">
+      <a:schemeClr val="dk2">
+        <a:shade val="80000"/>
+      </a:schemeClr>
+    </dgm:linClrLst>
+    <dgm:effectClrLst/>
+    <dgm:txLinClrLst/>
+    <dgm:txFillClrLst meth="repeat">
+      <a:schemeClr val="lt1"/>
+    </dgm:txFillClrLst>
+    <dgm:txEffectClrLst/>
+  </dgm:styleLbl>
+  <dgm:styleLbl name="bgImgPlace1">
+    <dgm:fillClrLst meth="repeat">
+      <a:schemeClr val="dk2">
+        <a:tint val="40000"/>
+      </a:schemeClr>
+    </dgm:fillClrLst>
+    <dgm:linClrLst meth="repeat">
+      <a:schemeClr val="dk2">
+        <a:shade val="80000"/>
+      </a:schemeClr>
+    </dgm:linClrLst>
+    <dgm:effectClrLst/>
+    <dgm:txLinClrLst/>
+    <dgm:txFillClrLst meth="repeat">
+      <a:schemeClr val="lt1"/>
+    </dgm:txFillClrLst>
+    <dgm:txEffectClrLst/>
+  </dgm:styleLbl>
+  <dgm:styleLbl name="sibTrans2D1">
+    <dgm:fillClrLst meth="repeat">
+      <a:schemeClr val="dk2">
+        <a:tint val="60000"/>
+      </a:schemeClr>
+    </dgm:fillClrLst>
+    <dgm:linClrLst meth="repeat">
+      <a:schemeClr val="dk2">
+        <a:tint val="60000"/>
+      </a:schemeClr>
+    </dgm:linClrLst>
+    <dgm:effectClrLst/>
+    <dgm:txLinClrLst/>
+    <dgm:txFillClrLst meth="repeat">
+      <a:schemeClr val="dk2"/>
+    </dgm:txFillClrLst>
+    <dgm:txEffectClrLst/>
+  </dgm:styleLbl>
+  <dgm:styleLbl name="fgSibTrans2D1">
+    <dgm:fillClrLst meth="repeat">
+      <a:schemeClr val="dk2">
+        <a:tint val="60000"/>
+      </a:schemeClr>
+    </dgm:fillClrLst>
+    <dgm:linClrLst meth="repeat">
+      <a:schemeClr val="dk2">
+        <a:tint val="60000"/>
+      </a:schemeClr>
+    </dgm:linClrLst>
+    <dgm:effectClrLst/>
+    <dgm:txLinClrLst/>
+    <dgm:txFillClrLst meth="repeat">
+      <a:schemeClr val="dk2"/>
+    </dgm:txFillClrLst>
+    <dgm:txEffectClrLst/>
+  </dgm:styleLbl>
+  <dgm:styleLbl name="bgSibTrans2D1">
+    <dgm:fillClrLst meth="repeat">
+      <a:schemeClr val="dk2">
+        <a:tint val="60000"/>
+      </a:schemeClr>
+    </dgm:fillClrLst>
+    <dgm:linClrLst meth="repeat">
+      <a:schemeClr val="dk2">
+        <a:tint val="60000"/>
+      </a:schemeClr>
+    </dgm:linClrLst>
+    <dgm:effectClrLst/>
+    <dgm:txLinClrLst/>
+    <dgm:txFillClrLst meth="repeat">
+      <a:schemeClr val="dk2"/>
+    </dgm:txFillClrLst>
+    <dgm:txEffectClrLst/>
+  </dgm:styleLbl>
+  <dgm:styleLbl name="sibTrans1D1">
+    <dgm:fillClrLst meth="repeat">
+      <a:schemeClr val="dk2"/>
+    </dgm:fillClrLst>
+    <dgm:linClrLst meth="repeat">
+      <a:schemeClr val="dk2"/>
+    </dgm:linClrLst>
+    <dgm:effectClrLst/>
+    <dgm:txLinClrLst/>
+    <dgm:txFillClrLst meth="repeat">
+      <a:schemeClr val="tx1"/>
+    </dgm:txFillClrLst>
+    <dgm:txEffectClrLst/>
+  </dgm:styleLbl>
+  <dgm:styleLbl name="callout">
+    <dgm:fillClrLst meth="repeat">
+      <a:schemeClr val="dk2"/>
+    </dgm:fillClrLst>
+    <dgm:linClrLst meth="repeat">
+      <a:schemeClr val="dk2"/>
+    </dgm:linClrLst>
+    <dgm:effectClrLst/>
+    <dgm:txLinClrLst/>
+    <dgm:txFillClrLst meth="repeat">
+      <a:schemeClr val="tx1"/>
+    </dgm:txFillClrLst>
+    <dgm:txEffectClrLst/>
+  </dgm:styleLbl>
+  <dgm:styleLbl name="asst0">
+    <dgm:fillClrLst meth="repeat">
+      <a:schemeClr val="lt1"/>
+    </dgm:fillClrLst>
+    <dgm:linClrLst meth="repeat">
+      <a:schemeClr val="dk2">
+        <a:shade val="80000"/>
+      </a:schemeClr>
+    </dgm:linClrLst>
+    <dgm:effectClrLst/>
+    <dgm:txLinClrLst/>
+    <dgm:txFillClrLst meth="repeat">
+      <a:schemeClr val="dk2"/>
+    </dgm:txFillClrLst>
+    <dgm:txEffectClrLst/>
+  </dgm:styleLbl>
+  <dgm:styleLbl name="asst1">
+    <dgm:fillClrLst meth="repeat">
+      <a:schemeClr val="lt1"/>
+    </dgm:fillClrLst>
+    <dgm:linClrLst meth="repeat">
+      <a:schemeClr val="dk2">
+        <a:shade val="80000"/>
+      </a:schemeClr>
+    </dgm:linClrLst>
+    <dgm:effectClrLst/>
+    <dgm:txLinClrLst/>
+    <dgm:txFillClrLst meth="repeat">
+      <a:schemeClr val="dk2"/>
+    </dgm:txFillClrLst>
+    <dgm:txEffectClrLst/>
+  </dgm:styleLbl>
+  <dgm:styleLbl name="asst2">
+    <dgm:fillClrLst meth="repeat">
+      <a:schemeClr val="lt1"/>
+    </dgm:fillClrLst>
+    <dgm:linClrLst meth="repeat">
+      <a:schemeClr val="dk2">
+        <a:shade val="80000"/>
+      </a:schemeClr>
+    </dgm:linClrLst>
+    <dgm:effectClrLst/>
+    <dgm:txLinClrLst/>
+    <dgm:txFillClrLst meth="repeat">
+      <a:schemeClr val="dk2"/>
+    </dgm:txFillClrLst>
+    <dgm:txEffectClrLst/>
+  </dgm:styleLbl>
+  <dgm:styleLbl name="asst3">
+    <dgm:fillClrLst meth="repeat">
+      <a:schemeClr val="lt1"/>
+    </dgm:fillClrLst>
+    <dgm:linClrLst meth="repeat">
+      <a:schemeClr val="dk2">
+        <a:shade val="80000"/>
+      </a:schemeClr>
+    </dgm:linClrLst>
+    <dgm:effectClrLst/>
+    <dgm:txLinClrLst/>
+    <dgm:txFillClrLst meth="repeat">
+      <a:schemeClr val="dk2"/>
+    </dgm:txFillClrLst>
+    <dgm:txEffectClrLst/>
+  </dgm:styleLbl>
+  <dgm:styleLbl name="asst4">
+    <dgm:fillClrLst meth="repeat">
+      <a:schemeClr val="lt1"/>
+    </dgm:fillClrLst>
+    <dgm:linClrLst meth="repeat">
+      <a:schemeClr val="dk2">
+        <a:shade val="80000"/>
+      </a:schemeClr>
+    </dgm:linClrLst>
+    <dgm:effectClrLst/>
+    <dgm:txLinClrLst/>
+    <dgm:txFillClrLst meth="repeat">
+      <a:schemeClr val="dk2"/>
+    </dgm:txFillClrLst>
+    <dgm:txEffectClrLst/>
+  </dgm:styleLbl>
+  <dgm:styleLbl name="parChTrans2D1">
+    <dgm:fillClrLst meth="repeat">
+      <a:schemeClr val="dk2">
+        <a:tint val="60000"/>
+      </a:schemeClr>
+    </dgm:fillClrLst>
+    <dgm:linClrLst meth="repeat">
+      <a:schemeClr val="dk2">
+        <a:tint val="60000"/>
+      </a:schemeClr>
+    </dgm:linClrLst>
+    <dgm:effectClrLst/>
+    <dgm:txLinClrLst/>
+    <dgm:txFillClrLst/>
+    <dgm:txEffectClrLst/>
+  </dgm:styleLbl>
+  <dgm:styleLbl name="parChTrans2D2">
+    <dgm:fillClrLst meth="repeat">
+      <a:schemeClr val="dk2"/>
+    </dgm:fillClrLst>
+    <dgm:linClrLst meth="repeat">
+      <a:schemeClr val="dk2"/>
+    </dgm:linClrLst>
+    <dgm:effectClrLst/>
+    <dgm:txLinClrLst/>
+    <dgm:txFillClrLst/>
+    <dgm:txEffectClrLst/>
+  </dgm:styleLbl>
+  <dgm:styleLbl name="parChTrans2D3">
+    <dgm:fillClrLst meth="repeat">
+      <a:schemeClr val="dk2"/>
+    </dgm:fillClrLst>
+    <dgm:linClrLst meth="repeat">
+      <a:schemeClr val="dk2"/>
+    </dgm:linClrLst>
+    <dgm:effectClrLst/>
+    <dgm:txLinClrLst/>
+    <dgm:txFillClrLst/>
+    <dgm:txEffectClrLst/>
+  </dgm:styleLbl>
+  <dgm:styleLbl name="parChTrans2D4">
+    <dgm:fillClrLst meth="repeat">
+      <a:schemeClr val="dk2"/>
+    </dgm:fillClrLst>
+    <dgm:linClrLst meth="repeat">
+      <a:schemeClr val="dk2"/>
+    </dgm:linClrLst>
+    <dgm:effectClrLst/>
+    <dgm:txLinClrLst/>
+    <dgm:txFillClrLst meth="repeat">
+      <a:schemeClr val="lt1"/>
+    </dgm:txFillClrLst>
+    <dgm:txEffectClrLst/>
+  </dgm:styleLbl>
+  <dgm:styleLbl name="parChTrans1D1">
+    <dgm:fillClrLst meth="repeat">
+      <a:schemeClr val="dk2"/>
+    </dgm:fillClrLst>
+    <dgm:linClrLst meth="repeat">
+      <a:schemeClr val="dk2">
+        <a:shade val="60000"/>
+      </a:schemeClr>
+    </dgm:linClrLst>
+    <dgm:effectClrLst/>
+    <dgm:txLinClrLst/>
+    <dgm:txFillClrLst meth="repeat">
+      <a:schemeClr val="tx1"/>
+    </dgm:txFillClrLst>
+    <dgm:txEffectClrLst/>
+  </dgm:styleLbl>
+  <dgm:styleLbl name="parChTrans1D2">
+    <dgm:fillClrLst meth="repeat">
+      <a:schemeClr val="dk2"/>
+    </dgm:fillClrLst>
+    <dgm:linClrLst meth="repeat">
+      <a:schemeClr val="dk2">
+        <a:shade val="60000"/>
+      </a:schemeClr>
+    </dgm:linClrLst>
+    <dgm:effectClrLst/>
+    <dgm:txLinClrLst/>
+    <dgm:txFillClrLst meth="repeat">
+      <a:schemeClr val="tx1"/>
+    </dgm:txFillClrLst>
+    <dgm:txEffectClrLst/>
+  </dgm:styleLbl>
+  <dgm:styleLbl name="parChTrans1D3">
+    <dgm:fillClrLst meth="repeat">
+      <a:schemeClr val="dk2"/>
+    </dgm:fillClrLst>
+    <dgm:linClrLst meth="repeat">
+      <a:schemeClr val="dk2">
+        <a:shade val="80000"/>
+      </a:schemeClr>
+    </dgm:linClrLst>
+    <dgm:effectClrLst/>
+    <dgm:txLinClrLst/>
+    <dgm:txFillClrLst meth="repeat">
+      <a:schemeClr val="tx1"/>
+    </dgm:txFillClrLst>
+    <dgm:txEffectClrLst/>
+  </dgm:styleLbl>
+  <dgm:styleLbl name="parChTrans1D4">
+    <dgm:fillClrLst meth="repeat">
+      <a:schemeClr val="dk2"/>
+    </dgm:fillClrLst>
+    <dgm:linClrLst meth="repeat">
+      <a:schemeClr val="dk2">
+        <a:shade val="80000"/>
+      </a:schemeClr>
+    </dgm:linClrLst>
+    <dgm:effectClrLst/>
+    <dgm:txLinClrLst/>
+    <dgm:txFillClrLst meth="repeat">
+      <a:schemeClr val="tx1"/>
+    </dgm:txFillClrLst>
+    <dgm:txEffectClrLst/>
+  </dgm:styleLbl>
+  <dgm:styleLbl name="fgAcc1">
+    <dgm:fillClrLst meth="repeat">
+      <a:schemeClr val="dk2">
+        <a:alpha val="90000"/>
+        <a:tint val="40000"/>
+      </a:schemeClr>
+    </dgm:fillClrLst>
+    <dgm:linClrLst meth="repeat">
+      <a:schemeClr val="dk2"/>
+    </dgm:linClrLst>
+    <dgm:effectClrLst/>
+    <dgm:txLinClrLst/>
+    <dgm:txFillClrLst meth="repeat">
+      <a:schemeClr val="dk2"/>
+    </dgm:txFillClrLst>
+    <dgm:txEffectClrLst/>
+  </dgm:styleLbl>
+  <dgm:styleLbl name="conFgAcc1">
+    <dgm:fillClrLst meth="repeat">
+      <a:schemeClr val="dk2">
+        <a:alpha val="90000"/>
+        <a:tint val="40000"/>
+      </a:schemeClr>
+    </dgm:fillClrLst>
+    <dgm:linClrLst meth="repeat">
+      <a:schemeClr val="dk2"/>
+    </dgm:linClrLst>
+    <dgm:effectClrLst/>
+    <dgm:txLinClrLst/>
+    <dgm:txFillClrLst meth="repeat">
+      <a:schemeClr val="dk2"/>
+    </dgm:txFillClrLst>
+    <dgm:txEffectClrLst/>
+  </dgm:styleLbl>
+  <dgm:styleLbl name="alignAcc1">
+    <dgm:fillClrLst meth="repeat">
+      <a:schemeClr val="dk2">
+        <a:alpha val="90000"/>
+        <a:tint val="40000"/>
+      </a:schemeClr>
+    </dgm:fillClrLst>
+    <dgm:linClrLst meth="repeat">
+      <a:schemeClr val="dk2"/>
+    </dgm:linClrLst>
+    <dgm:effectClrLst/>
+    <dgm:txLinClrLst/>
+    <dgm:txFillClrLst meth="repeat">
+      <a:schemeClr val="dk2"/>
+    </dgm:txFillClrLst>
+    <dgm:txEffectClrLst/>
+  </dgm:styleLbl>
+  <dgm:styleLbl name="trAlignAcc1">
+    <dgm:fillClrLst meth="repeat">
+      <a:schemeClr val="dk2">
+        <a:alpha val="40000"/>
+        <a:tint val="40000"/>
+      </a:schemeClr>
+    </dgm:fillClrLst>
+    <dgm:linClrLst meth="repeat">
+      <a:schemeClr val="dk2"/>
+    </dgm:linClrLst>
+    <dgm:effectClrLst/>
+    <dgm:txLinClrLst/>
+    <dgm:txFillClrLst meth="repeat">
+      <a:schemeClr val="dk2"/>
+    </dgm:txFillClrLst>
+    <dgm:txEffectClrLst/>
+  </dgm:styleLbl>
+  <dgm:styleLbl name="bgAcc1">
+    <dgm:fillClrLst meth="repeat">
+      <a:schemeClr val="dk2">
+        <a:alpha val="90000"/>
+        <a:tint val="40000"/>
+      </a:schemeClr>
+    </dgm:fillClrLst>
+    <dgm:linClrLst meth="repeat">
+      <a:schemeClr val="dk2"/>
+    </dgm:linClrLst>
+    <dgm:effectClrLst/>
+    <dgm:txLinClrLst/>
+    <dgm:txFillClrLst meth="repeat">
+      <a:schemeClr val="dk2"/>
+    </dgm:txFillClrLst>
+    <dgm:txEffectClrLst/>
+  </dgm:styleLbl>
+  <dgm:styleLbl name="solidFgAcc1">
+    <dgm:fillClrLst meth="repeat">
+      <a:schemeClr val="lt1"/>
+    </dgm:fillClrLst>
+    <dgm:linClrLst meth="repeat">
+      <a:schemeClr val="dk2"/>
+    </dgm:linClrLst>
+    <dgm:effectClrLst/>
+    <dgm:txLinClrLst/>
+    <dgm:txFillClrLst meth="repeat">
+      <a:schemeClr val="dk2"/>
+    </dgm:txFillClrLst>
+    <dgm:txEffectClrLst/>
+  </dgm:styleLbl>
+  <dgm:styleLbl name="solidAlignAcc1">
+    <dgm:fillClrLst meth="repeat">
+      <a:schemeClr val="lt1"/>
+    </dgm:fillClrLst>
+    <dgm:linClrLst meth="repeat">
+      <a:schemeClr val="dk2"/>
+    </dgm:linClrLst>
+    <dgm:effectClrLst/>
+    <dgm:txLinClrLst/>
+    <dgm:txFillClrLst meth="repeat">
+      <a:schemeClr val="dk2"/>
+    </dgm:txFillClrLst>
+    <dgm:txEffectClrLst/>
+  </dgm:styleLbl>
+  <dgm:styleLbl name="solidBgAcc1">
+    <dgm:fillClrLst meth="repeat">
+      <a:schemeClr val="lt1"/>
+    </dgm:fillClrLst>
+    <dgm:linClrLst meth="repeat">
+      <a:schemeClr val="dk2"/>
+    </dgm:linClrLst>
+    <dgm:effectClrLst/>
+    <dgm:txLinClrLst/>
+    <dgm:txFillClrLst meth="repeat">
+      <a:schemeClr val="dk2"/>
+    </dgm:txFillClrLst>
+    <dgm:txEffectClrLst/>
+  </dgm:styleLbl>
+  <dgm:styleLbl name="fgAccFollowNode1">
+    <dgm:fillClrLst meth="repeat">
+      <a:schemeClr val="lt1">
+        <a:alpha val="90000"/>
+        <a:tint val="40000"/>
+      </a:schemeClr>
+    </dgm:fillClrLst>
+    <dgm:linClrLst meth="repeat">
+      <a:schemeClr val="dk2">
+        <a:alpha val="90000"/>
+      </a:schemeClr>
+    </dgm:linClrLst>
+    <dgm:effectClrLst/>
+    <dgm:txLinClrLst/>
+    <dgm:txFillClrLst meth="repeat">
+      <a:schemeClr val="dk2"/>
+    </dgm:txFillClrLst>
+    <dgm:txEffectClrLst/>
+  </dgm:styleLbl>
+  <dgm:styleLbl name="alignAccFollowNode1">
+    <dgm:fillClrLst meth="repeat">
+      <a:schemeClr val="lt1">
+        <a:alpha val="90000"/>
+        <a:tint val="40000"/>
+      </a:schemeClr>
+    </dgm:fillClrLst>
+    <dgm:linClrLst meth="repeat">
+      <a:schemeClr val="dk2">
+        <a:alpha val="90000"/>
+      </a:schemeClr>
+    </dgm:linClrLst>
+    <dgm:effectClrLst/>
+    <dgm:txLinClrLst/>
+    <dgm:txFillClrLst meth="repeat">
+      <a:schemeClr val="dk2"/>
+    </dgm:txFillClrLst>
+    <dgm:txEffectClrLst/>
+  </dgm:styleLbl>
+  <dgm:styleLbl name="bgAccFollowNode1">
+    <dgm:fillClrLst meth="repeat">
+      <a:schemeClr val="lt1">
+        <a:alpha val="90000"/>
+        <a:tint val="40000"/>
+      </a:schemeClr>
+    </dgm:fillClrLst>
+    <dgm:linClrLst meth="repeat">
+      <a:schemeClr val="dk2">
+        <a:alpha val="90000"/>
+      </a:schemeClr>
+    </dgm:linClrLst>
+    <dgm:effectClrLst/>
+    <dgm:txLinClrLst/>
+    <dgm:txFillClrLst meth="repeat">
+      <a:schemeClr val="dk2"/>
+    </dgm:txFillClrLst>
+    <dgm:txEffectClrLst/>
+  </dgm:styleLbl>
+  <dgm:styleLbl name="fgAcc0">
+    <dgm:fillClrLst meth="repeat">
+      <a:schemeClr val="dk2">
+        <a:alpha val="90000"/>
+        <a:tint val="40000"/>
+      </a:schemeClr>
+    </dgm:fillClrLst>
+    <dgm:linClrLst meth="repeat">
+      <a:schemeClr val="dk2"/>
+    </dgm:linClrLst>
+    <dgm:effectClrLst/>
+    <dgm:txLinClrLst/>
+    <dgm:txFillClrLst meth="repeat">
+      <a:schemeClr val="dk2"/>
+    </dgm:txFillClrLst>
+    <dgm:txEffectClrLst/>
+  </dgm:styleLbl>
+  <dgm:styleLbl name="fgAcc2">
+    <dgm:fillClrLst meth="repeat">
+      <a:schemeClr val="dk2">
+        <a:alpha val="90000"/>
+        <a:tint val="40000"/>
+      </a:schemeClr>
+    </dgm:fillClrLst>
+    <dgm:linClrLst meth="repeat">
+      <a:schemeClr val="dk2"/>
+    </dgm:linClrLst>
+    <dgm:effectClrLst/>
+    <dgm:txLinClrLst/>
+    <dgm:txFillClrLst meth="repeat">
+      <a:schemeClr val="dk2"/>
+    </dgm:txFillClrLst>
+    <dgm:txEffectClrLst/>
+  </dgm:styleLbl>
+  <dgm:styleLbl name="fgAcc3">
+    <dgm:fillClrLst meth="repeat">
+      <a:schemeClr val="dk2">
+        <a:alpha val="90000"/>
+        <a:tint val="40000"/>
+      </a:schemeClr>
+    </dgm:fillClrLst>
+    <dgm:linClrLst meth="repeat">
+      <a:schemeClr val="dk2"/>
+    </dgm:linClrLst>
+    <dgm:effectClrLst/>
+    <dgm:txLinClrLst/>
+    <dgm:txFillClrLst meth="repeat">
+      <a:schemeClr val="dk2"/>
+    </dgm:txFillClrLst>
+    <dgm:txEffectClrLst/>
+  </dgm:styleLbl>
+  <dgm:styleLbl name="fgAcc4">
+    <dgm:fillClrLst meth="repeat">
+      <a:schemeClr val="dk2">
+        <a:alpha val="90000"/>
+        <a:tint val="40000"/>
+      </a:schemeClr>
+    </dgm:fillClrLst>
+    <dgm:linClrLst meth="repeat">
+      <a:schemeClr val="dk2"/>
+    </dgm:linClrLst>
+    <dgm:effectClrLst/>
+    <dgm:txLinClrLst/>
+    <dgm:txFillClrLst meth="repeat">
+      <a:schemeClr val="dk2"/>
+    </dgm:txFillClrLst>
+    <dgm:txEffectClrLst/>
+  </dgm:styleLbl>
+  <dgm:styleLbl name="bgShp">
+    <dgm:fillClrLst meth="repeat">
+      <a:schemeClr val="dk2">
+        <a:tint val="40000"/>
+      </a:schemeClr>
+    </dgm:fillClrLst>
+    <dgm:linClrLst meth="repeat">
+      <a:schemeClr val="dk2"/>
+    </dgm:linClrLst>
+    <dgm:effectClrLst/>
+    <dgm:txLinClrLst/>
+    <dgm:txFillClrLst meth="repeat">
+      <a:schemeClr val="dk1"/>
+    </dgm:txFillClrLst>
+    <dgm:txEffectClrLst/>
+  </dgm:styleLbl>
+  <dgm:styleLbl name="dkBgShp">
+    <dgm:fillClrLst meth="repeat">
+      <a:schemeClr val="dk2">
+        <a:shade val="80000"/>
+      </a:schemeClr>
+    </dgm:fillClrLst>
+    <dgm:linClrLst meth="repeat">
+      <a:schemeClr val="dk2"/>
+    </dgm:linClrLst>
+    <dgm:effectClrLst/>
+    <dgm:txLinClrLst/>
+    <dgm:txFillClrLst meth="repeat">
+      <a:schemeClr val="lt2"/>
+    </dgm:txFillClrLst>
+    <dgm:txEffectClrLst/>
+  </dgm:styleLbl>
+  <dgm:styleLbl name="trBgShp">
+    <dgm:fillClrLst meth="repeat">
+      <a:schemeClr val="dk2">
+        <a:tint val="50000"/>
+        <a:alpha val="40000"/>
+      </a:schemeClr>
+    </dgm:fillClrLst>
+    <dgm:linClrLst meth="repeat">
+      <a:schemeClr val="dk2"/>
+    </dgm:linClrLst>
+    <dgm:effectClrLst/>
+    <dgm:txLinClrLst/>
+    <dgm:txFillClrLst meth="repeat">
+      <a:schemeClr val="lt2"/>
+    </dgm:txFillClrLst>
+    <dgm:txEffectClrLst/>
+  </dgm:styleLbl>
+  <dgm:styleLbl name="fgShp">
+    <dgm:fillClrLst meth="repeat">
+      <a:schemeClr val="dk2">
+        <a:tint val="60000"/>
+      </a:schemeClr>
+    </dgm:fillClrLst>
+    <dgm:linClrLst meth="repeat">
+      <a:schemeClr val="lt1"/>
+    </dgm:linClrLst>
+    <dgm:effectClrLst/>
+    <dgm:txLinClrLst/>
+    <dgm:txFillClrLst meth="repeat">
+      <a:schemeClr val="dk2"/>
+    </dgm:txFillClrLst>
+    <dgm:txEffectClrLst/>
+  </dgm:styleLbl>
+  <dgm:styleLbl name="revTx">
+    <dgm:fillClrLst meth="repeat">
+      <a:schemeClr val="lt1">
+        <a:alpha val="0"/>
+      </a:schemeClr>
+    </dgm:fillClrLst>
+    <dgm:linClrLst meth="repeat">
+      <a:schemeClr val="dk2">
+        <a:alpha val="0"/>
+      </a:schemeClr>
+    </dgm:linClrLst>
+    <dgm:effectClrLst/>
+    <dgm:txLinClrLst/>
+    <dgm:txFillClrLst meth="repeat">
+      <a:schemeClr val="tx1"/>
+    </dgm:txFillClrLst>
+    <dgm:txEffectClrLst/>
+  </dgm:styleLbl>
+</dgm:colorsDef>
+</file>
+
+<file path=ppt/diagrams/data1.xml><?xml version="1.0" encoding="utf-8"?>
+<dgm:dataModel xmlns:dgm="http://schemas.openxmlformats.org/drawingml/2006/diagram" xmlns:a="http://schemas.openxmlformats.org/drawingml/2006/main">
+  <dgm:ptLst>
+    <dgm:pt modelId="{06F25AE4-A319-4F2D-B9D9-CA8E16E34D09}" type="doc">
+      <dgm:prSet loTypeId="urn:microsoft.com/office/officeart/2005/8/layout/vList2" loCatId="list" qsTypeId="urn:microsoft.com/office/officeart/2005/8/quickstyle/simple1" qsCatId="simple" csTypeId="urn:microsoft.com/office/officeart/2005/8/colors/accent0_2" csCatId="mainScheme" phldr="1"/>
+      <dgm:spPr/>
+      <dgm:t>
+        <a:bodyPr/>
+        <a:lstStyle/>
+        <a:p>
+          <a:endParaRPr lang="en-US"/>
+        </a:p>
+      </dgm:t>
+    </dgm:pt>
+    <dgm:pt modelId="{73C1CEFE-7475-4CE0-9D44-919BF97AECA3}">
+      <dgm:prSet/>
+      <dgm:spPr/>
+      <dgm:t>
+        <a:bodyPr/>
+        <a:lstStyle/>
+        <a:p>
+          <a:r>
+            <a:rPr lang="en-US" dirty="0"/>
+            <a:t>San Marino </a:t>
+          </a:r>
+        </a:p>
+      </dgm:t>
+    </dgm:pt>
+    <dgm:pt modelId="{223B408B-1F4E-4834-8025-D596B208C59D}" type="parTrans" cxnId="{9970B9E4-3082-43AE-9EED-E2F698838803}">
+      <dgm:prSet/>
+      <dgm:spPr/>
+      <dgm:t>
+        <a:bodyPr/>
+        <a:lstStyle/>
+        <a:p>
+          <a:endParaRPr lang="en-US"/>
+        </a:p>
+      </dgm:t>
+    </dgm:pt>
+    <dgm:pt modelId="{DA80EC26-7A93-4149-92CE-29B8CBBBABCC}" type="sibTrans" cxnId="{9970B9E4-3082-43AE-9EED-E2F698838803}">
+      <dgm:prSet/>
+      <dgm:spPr/>
+      <dgm:t>
+        <a:bodyPr/>
+        <a:lstStyle/>
+        <a:p>
+          <a:endParaRPr lang="en-US"/>
+        </a:p>
+      </dgm:t>
+    </dgm:pt>
+    <dgm:pt modelId="{E61A0357-25B2-473D-9E45-47797E6AB72D}">
+      <dgm:prSet/>
+      <dgm:spPr/>
+      <dgm:t>
+        <a:bodyPr/>
+        <a:lstStyle/>
+        <a:p>
+          <a:r>
+            <a:rPr lang="en-US"/>
+            <a:t>North Korea</a:t>
+          </a:r>
+        </a:p>
+      </dgm:t>
+    </dgm:pt>
+    <dgm:pt modelId="{B336C309-851A-4299-98CE-AAECAE3CB0D6}" type="parTrans" cxnId="{E3A10AA0-8305-43CA-B600-8CE017E99878}">
+      <dgm:prSet/>
+      <dgm:spPr/>
+      <dgm:t>
+        <a:bodyPr/>
+        <a:lstStyle/>
+        <a:p>
+          <a:endParaRPr lang="en-US"/>
+        </a:p>
+      </dgm:t>
+    </dgm:pt>
+    <dgm:pt modelId="{62023B90-F701-46A0-A8CD-89A9CC1F86A8}" type="sibTrans" cxnId="{E3A10AA0-8305-43CA-B600-8CE017E99878}">
+      <dgm:prSet/>
+      <dgm:spPr/>
+      <dgm:t>
+        <a:bodyPr/>
+        <a:lstStyle/>
+        <a:p>
+          <a:endParaRPr lang="en-US"/>
+        </a:p>
+      </dgm:t>
+    </dgm:pt>
+    <dgm:pt modelId="{9D65D4F8-0AB0-4B07-BFCF-128A0CED08FC}">
+      <dgm:prSet/>
+      <dgm:spPr/>
+      <dgm:t>
+        <a:bodyPr/>
+        <a:lstStyle/>
+        <a:p>
+          <a:r>
+            <a:rPr lang="en-US"/>
+            <a:t>Monaco</a:t>
+          </a:r>
+        </a:p>
+      </dgm:t>
+    </dgm:pt>
+    <dgm:pt modelId="{DFA0AB14-2B6B-4CA0-AA85-5CB819BB7348}" type="parTrans" cxnId="{1D267103-4A16-4FD2-9F26-A3AEB970A48E}">
+      <dgm:prSet/>
+      <dgm:spPr/>
+      <dgm:t>
+        <a:bodyPr/>
+        <a:lstStyle/>
+        <a:p>
+          <a:endParaRPr lang="en-US"/>
+        </a:p>
+      </dgm:t>
+    </dgm:pt>
+    <dgm:pt modelId="{6C0F93FD-5518-4AE8-9C99-74A8F5D38B38}" type="sibTrans" cxnId="{1D267103-4A16-4FD2-9F26-A3AEB970A48E}">
+      <dgm:prSet/>
+      <dgm:spPr/>
+      <dgm:t>
+        <a:bodyPr/>
+        <a:lstStyle/>
+        <a:p>
+          <a:endParaRPr lang="en-US"/>
+        </a:p>
+      </dgm:t>
+    </dgm:pt>
+    <dgm:pt modelId="{A1BFD283-A5C6-4DF0-98A8-5F774F5E7275}">
+      <dgm:prSet/>
+      <dgm:spPr/>
+      <dgm:t>
+        <a:bodyPr/>
+        <a:lstStyle/>
+        <a:p>
+          <a:r>
+            <a:rPr lang="en-US"/>
+            <a:t>Holy See</a:t>
+          </a:r>
+        </a:p>
+      </dgm:t>
+    </dgm:pt>
+    <dgm:pt modelId="{D5F5B9DB-94E5-4C20-8BD9-AA9E5174C361}" type="parTrans" cxnId="{3FDE3966-39EC-4DC8-BDF6-210666378825}">
+      <dgm:prSet/>
+      <dgm:spPr/>
+      <dgm:t>
+        <a:bodyPr/>
+        <a:lstStyle/>
+        <a:p>
+          <a:endParaRPr lang="en-US"/>
+        </a:p>
+      </dgm:t>
+    </dgm:pt>
+    <dgm:pt modelId="{96B3F99E-844F-48F5-B421-62FF733C7541}" type="sibTrans" cxnId="{3FDE3966-39EC-4DC8-BDF6-210666378825}">
+      <dgm:prSet/>
+      <dgm:spPr/>
+      <dgm:t>
+        <a:bodyPr/>
+        <a:lstStyle/>
+        <a:p>
+          <a:endParaRPr lang="en-US"/>
+        </a:p>
+      </dgm:t>
+    </dgm:pt>
+    <dgm:pt modelId="{08EBBF5C-76E1-41C4-B6DC-4E1025B069DE}">
+      <dgm:prSet/>
+      <dgm:spPr/>
+      <dgm:t>
+        <a:bodyPr/>
+        <a:lstStyle/>
+        <a:p>
+          <a:r>
+            <a:rPr lang="en-US"/>
+            <a:t>Taiwan</a:t>
+          </a:r>
+        </a:p>
+      </dgm:t>
+    </dgm:pt>
+    <dgm:pt modelId="{85ACC206-CCE8-4B5B-8574-87B2940D9EB1}" type="parTrans" cxnId="{A81B4728-87D1-48D2-BB96-0C1C84562187}">
+      <dgm:prSet/>
+      <dgm:spPr/>
+      <dgm:t>
+        <a:bodyPr/>
+        <a:lstStyle/>
+        <a:p>
+          <a:endParaRPr lang="en-US"/>
+        </a:p>
+      </dgm:t>
+    </dgm:pt>
+    <dgm:pt modelId="{7EFAAE26-E851-4B26-B486-2406679DB020}" type="sibTrans" cxnId="{A81B4728-87D1-48D2-BB96-0C1C84562187}">
+      <dgm:prSet/>
+      <dgm:spPr/>
+      <dgm:t>
+        <a:bodyPr/>
+        <a:lstStyle/>
+        <a:p>
+          <a:endParaRPr lang="en-US"/>
+        </a:p>
+      </dgm:t>
+    </dgm:pt>
+    <dgm:pt modelId="{E2EE27DF-4B21-4E31-A45D-647630E6080B}">
+      <dgm:prSet/>
+      <dgm:spPr/>
+      <dgm:t>
+        <a:bodyPr/>
+        <a:lstStyle/>
+        <a:p>
+          <a:r>
+            <a:rPr lang="en-US"/>
+            <a:t>Andorra</a:t>
+          </a:r>
+        </a:p>
+      </dgm:t>
+    </dgm:pt>
+    <dgm:pt modelId="{F2EAC336-94D8-416E-9442-A4D6C9F8B5D2}" type="parTrans" cxnId="{15D182A9-F38A-4893-A0B8-0CDB3DD03EC8}">
+      <dgm:prSet/>
+      <dgm:spPr/>
+      <dgm:t>
+        <a:bodyPr/>
+        <a:lstStyle/>
+        <a:p>
+          <a:endParaRPr lang="en-US"/>
+        </a:p>
+      </dgm:t>
+    </dgm:pt>
+    <dgm:pt modelId="{56429977-D171-46BF-9283-5818282CFBD8}" type="sibTrans" cxnId="{15D182A9-F38A-4893-A0B8-0CDB3DD03EC8}">
+      <dgm:prSet/>
+      <dgm:spPr/>
+      <dgm:t>
+        <a:bodyPr/>
+        <a:lstStyle/>
+        <a:p>
+          <a:endParaRPr lang="en-US"/>
+        </a:p>
+      </dgm:t>
+    </dgm:pt>
+    <dgm:pt modelId="{D4D42D3D-9299-4362-A040-F39EA91EDB16}">
+      <dgm:prSet/>
+      <dgm:spPr/>
+      <dgm:t>
+        <a:bodyPr/>
+        <a:lstStyle/>
+        <a:p>
+          <a:r>
+            <a:rPr lang="en-US"/>
+            <a:t>Liechtenstein</a:t>
+          </a:r>
+        </a:p>
+      </dgm:t>
+    </dgm:pt>
+    <dgm:pt modelId="{A541C3A1-48F7-4EFA-9122-D9F3515AD5C7}" type="parTrans" cxnId="{1DD557A0-EF0D-44AB-AECA-CCC41159C077}">
+      <dgm:prSet/>
+      <dgm:spPr/>
+      <dgm:t>
+        <a:bodyPr/>
+        <a:lstStyle/>
+        <a:p>
+          <a:endParaRPr lang="en-US"/>
+        </a:p>
+      </dgm:t>
+    </dgm:pt>
+    <dgm:pt modelId="{ECCCC911-19C3-4CA4-86A4-70F13812B12E}" type="sibTrans" cxnId="{1DD557A0-EF0D-44AB-AECA-CCC41159C077}">
+      <dgm:prSet/>
+      <dgm:spPr/>
+      <dgm:t>
+        <a:bodyPr/>
+        <a:lstStyle/>
+        <a:p>
+          <a:endParaRPr lang="en-US"/>
+        </a:p>
+      </dgm:t>
+    </dgm:pt>
+    <dgm:pt modelId="{95735D56-7087-452F-B04D-9724272DCB20}" type="pres">
+      <dgm:prSet presAssocID="{06F25AE4-A319-4F2D-B9D9-CA8E16E34D09}" presName="linear" presStyleCnt="0">
+        <dgm:presLayoutVars>
+          <dgm:animLvl val="lvl"/>
+          <dgm:resizeHandles val="exact"/>
+        </dgm:presLayoutVars>
+      </dgm:prSet>
+      <dgm:spPr/>
+    </dgm:pt>
+    <dgm:pt modelId="{004A2D63-A834-4D6E-9977-6F469B885DDA}" type="pres">
+      <dgm:prSet presAssocID="{73C1CEFE-7475-4CE0-9D44-919BF97AECA3}" presName="parentText" presStyleLbl="node1" presStyleIdx="0" presStyleCnt="7">
+        <dgm:presLayoutVars>
+          <dgm:chMax val="0"/>
+          <dgm:bulletEnabled val="1"/>
+        </dgm:presLayoutVars>
+      </dgm:prSet>
+      <dgm:spPr/>
+    </dgm:pt>
+    <dgm:pt modelId="{377036A0-4F44-49E2-AF9D-52B017432CEC}" type="pres">
+      <dgm:prSet presAssocID="{DA80EC26-7A93-4149-92CE-29B8CBBBABCC}" presName="spacer" presStyleCnt="0"/>
+      <dgm:spPr/>
+    </dgm:pt>
+    <dgm:pt modelId="{BBED0CE2-FFAD-4E75-9809-8E864F5942E5}" type="pres">
+      <dgm:prSet presAssocID="{E61A0357-25B2-473D-9E45-47797E6AB72D}" presName="parentText" presStyleLbl="node1" presStyleIdx="1" presStyleCnt="7">
+        <dgm:presLayoutVars>
+          <dgm:chMax val="0"/>
+          <dgm:bulletEnabled val="1"/>
+        </dgm:presLayoutVars>
+      </dgm:prSet>
+      <dgm:spPr/>
+    </dgm:pt>
+    <dgm:pt modelId="{8127DFB1-6049-4A1C-90ED-756EA5D2DCDB}" type="pres">
+      <dgm:prSet presAssocID="{62023B90-F701-46A0-A8CD-89A9CC1F86A8}" presName="spacer" presStyleCnt="0"/>
+      <dgm:spPr/>
+    </dgm:pt>
+    <dgm:pt modelId="{06FF5538-C590-45B5-8976-89A6A4B0AEE0}" type="pres">
+      <dgm:prSet presAssocID="{9D65D4F8-0AB0-4B07-BFCF-128A0CED08FC}" presName="parentText" presStyleLbl="node1" presStyleIdx="2" presStyleCnt="7">
+        <dgm:presLayoutVars>
+          <dgm:chMax val="0"/>
+          <dgm:bulletEnabled val="1"/>
+        </dgm:presLayoutVars>
+      </dgm:prSet>
+      <dgm:spPr/>
+    </dgm:pt>
+    <dgm:pt modelId="{79995EDB-FAF7-46AE-A8BB-21892B54F7F8}" type="pres">
+      <dgm:prSet presAssocID="{6C0F93FD-5518-4AE8-9C99-74A8F5D38B38}" presName="spacer" presStyleCnt="0"/>
+      <dgm:spPr/>
+    </dgm:pt>
+    <dgm:pt modelId="{72399B0C-D373-4A86-80F6-1FBFD8A65DD3}" type="pres">
+      <dgm:prSet presAssocID="{A1BFD283-A5C6-4DF0-98A8-5F774F5E7275}" presName="parentText" presStyleLbl="node1" presStyleIdx="3" presStyleCnt="7">
+        <dgm:presLayoutVars>
+          <dgm:chMax val="0"/>
+          <dgm:bulletEnabled val="1"/>
+        </dgm:presLayoutVars>
+      </dgm:prSet>
+      <dgm:spPr/>
+    </dgm:pt>
+    <dgm:pt modelId="{0680EB52-DE64-446E-8BA8-19FFC4A30509}" type="pres">
+      <dgm:prSet presAssocID="{96B3F99E-844F-48F5-B421-62FF733C7541}" presName="spacer" presStyleCnt="0"/>
+      <dgm:spPr/>
+    </dgm:pt>
+    <dgm:pt modelId="{7361D7DE-4853-4FD8-B8E1-4BE6C45DC4F0}" type="pres">
+      <dgm:prSet presAssocID="{08EBBF5C-76E1-41C4-B6DC-4E1025B069DE}" presName="parentText" presStyleLbl="node1" presStyleIdx="4" presStyleCnt="7">
+        <dgm:presLayoutVars>
+          <dgm:chMax val="0"/>
+          <dgm:bulletEnabled val="1"/>
+        </dgm:presLayoutVars>
+      </dgm:prSet>
+      <dgm:spPr/>
+    </dgm:pt>
+    <dgm:pt modelId="{1F93351C-65ED-4D6F-925E-AF82DF0C35FB}" type="pres">
+      <dgm:prSet presAssocID="{7EFAAE26-E851-4B26-B486-2406679DB020}" presName="spacer" presStyleCnt="0"/>
+      <dgm:spPr/>
+    </dgm:pt>
+    <dgm:pt modelId="{69DF2F43-4DBD-435D-9F36-90A1C54EFD33}" type="pres">
+      <dgm:prSet presAssocID="{E2EE27DF-4B21-4E31-A45D-647630E6080B}" presName="parentText" presStyleLbl="node1" presStyleIdx="5" presStyleCnt="7">
+        <dgm:presLayoutVars>
+          <dgm:chMax val="0"/>
+          <dgm:bulletEnabled val="1"/>
+        </dgm:presLayoutVars>
+      </dgm:prSet>
+      <dgm:spPr/>
+    </dgm:pt>
+    <dgm:pt modelId="{5BC87031-706D-4C71-9C15-A0B6AFF6EED1}" type="pres">
+      <dgm:prSet presAssocID="{56429977-D171-46BF-9283-5818282CFBD8}" presName="spacer" presStyleCnt="0"/>
+      <dgm:spPr/>
+    </dgm:pt>
+    <dgm:pt modelId="{4173CE96-7E06-4D7D-A47C-FDB580CB7D34}" type="pres">
+      <dgm:prSet presAssocID="{D4D42D3D-9299-4362-A040-F39EA91EDB16}" presName="parentText" presStyleLbl="node1" presStyleIdx="6" presStyleCnt="7">
+        <dgm:presLayoutVars>
+          <dgm:chMax val="0"/>
+          <dgm:bulletEnabled val="1"/>
+        </dgm:presLayoutVars>
+      </dgm:prSet>
+      <dgm:spPr/>
+    </dgm:pt>
+  </dgm:ptLst>
+  <dgm:cxnLst>
+    <dgm:cxn modelId="{1D267103-4A16-4FD2-9F26-A3AEB970A48E}" srcId="{06F25AE4-A319-4F2D-B9D9-CA8E16E34D09}" destId="{9D65D4F8-0AB0-4B07-BFCF-128A0CED08FC}" srcOrd="2" destOrd="0" parTransId="{DFA0AB14-2B6B-4CA0-AA85-5CB819BB7348}" sibTransId="{6C0F93FD-5518-4AE8-9C99-74A8F5D38B38}"/>
+    <dgm:cxn modelId="{8615EA0F-6260-40C7-9D29-8740F6CF8BFE}" type="presOf" srcId="{06F25AE4-A319-4F2D-B9D9-CA8E16E34D09}" destId="{95735D56-7087-452F-B04D-9724272DCB20}" srcOrd="0" destOrd="0" presId="urn:microsoft.com/office/officeart/2005/8/layout/vList2"/>
+    <dgm:cxn modelId="{A81B4728-87D1-48D2-BB96-0C1C84562187}" srcId="{06F25AE4-A319-4F2D-B9D9-CA8E16E34D09}" destId="{08EBBF5C-76E1-41C4-B6DC-4E1025B069DE}" srcOrd="4" destOrd="0" parTransId="{85ACC206-CCE8-4B5B-8574-87B2940D9EB1}" sibTransId="{7EFAAE26-E851-4B26-B486-2406679DB020}"/>
+    <dgm:cxn modelId="{FC52EA61-173A-4072-943E-7DBFB52F077D}" type="presOf" srcId="{73C1CEFE-7475-4CE0-9D44-919BF97AECA3}" destId="{004A2D63-A834-4D6E-9977-6F469B885DDA}" srcOrd="0" destOrd="0" presId="urn:microsoft.com/office/officeart/2005/8/layout/vList2"/>
+    <dgm:cxn modelId="{3FDE3966-39EC-4DC8-BDF6-210666378825}" srcId="{06F25AE4-A319-4F2D-B9D9-CA8E16E34D09}" destId="{A1BFD283-A5C6-4DF0-98A8-5F774F5E7275}" srcOrd="3" destOrd="0" parTransId="{D5F5B9DB-94E5-4C20-8BD9-AA9E5174C361}" sibTransId="{96B3F99E-844F-48F5-B421-62FF733C7541}"/>
+    <dgm:cxn modelId="{019AC459-168D-4D7E-9076-F75B19A661AD}" type="presOf" srcId="{9D65D4F8-0AB0-4B07-BFCF-128A0CED08FC}" destId="{06FF5538-C590-45B5-8976-89A6A4B0AEE0}" srcOrd="0" destOrd="0" presId="urn:microsoft.com/office/officeart/2005/8/layout/vList2"/>
+    <dgm:cxn modelId="{8B69D68B-5E2A-4F88-BDAD-791A0BB3934A}" type="presOf" srcId="{D4D42D3D-9299-4362-A040-F39EA91EDB16}" destId="{4173CE96-7E06-4D7D-A47C-FDB580CB7D34}" srcOrd="0" destOrd="0" presId="urn:microsoft.com/office/officeart/2005/8/layout/vList2"/>
+    <dgm:cxn modelId="{59C7838E-3390-4F71-86C5-6F24D1DAF8F0}" type="presOf" srcId="{E2EE27DF-4B21-4E31-A45D-647630E6080B}" destId="{69DF2F43-4DBD-435D-9F36-90A1C54EFD33}" srcOrd="0" destOrd="0" presId="urn:microsoft.com/office/officeart/2005/8/layout/vList2"/>
+    <dgm:cxn modelId="{A19B9A93-1BFD-414A-B29A-CCF249E919BA}" type="presOf" srcId="{E61A0357-25B2-473D-9E45-47797E6AB72D}" destId="{BBED0CE2-FFAD-4E75-9809-8E864F5942E5}" srcOrd="0" destOrd="0" presId="urn:microsoft.com/office/officeart/2005/8/layout/vList2"/>
+    <dgm:cxn modelId="{7A86189F-C35D-4862-A3AD-94A361655972}" type="presOf" srcId="{A1BFD283-A5C6-4DF0-98A8-5F774F5E7275}" destId="{72399B0C-D373-4A86-80F6-1FBFD8A65DD3}" srcOrd="0" destOrd="0" presId="urn:microsoft.com/office/officeart/2005/8/layout/vList2"/>
+    <dgm:cxn modelId="{E3A10AA0-8305-43CA-B600-8CE017E99878}" srcId="{06F25AE4-A319-4F2D-B9D9-CA8E16E34D09}" destId="{E61A0357-25B2-473D-9E45-47797E6AB72D}" srcOrd="1" destOrd="0" parTransId="{B336C309-851A-4299-98CE-AAECAE3CB0D6}" sibTransId="{62023B90-F701-46A0-A8CD-89A9CC1F86A8}"/>
+    <dgm:cxn modelId="{1DD557A0-EF0D-44AB-AECA-CCC41159C077}" srcId="{06F25AE4-A319-4F2D-B9D9-CA8E16E34D09}" destId="{D4D42D3D-9299-4362-A040-F39EA91EDB16}" srcOrd="6" destOrd="0" parTransId="{A541C3A1-48F7-4EFA-9122-D9F3515AD5C7}" sibTransId="{ECCCC911-19C3-4CA4-86A4-70F13812B12E}"/>
+    <dgm:cxn modelId="{15D182A9-F38A-4893-A0B8-0CDB3DD03EC8}" srcId="{06F25AE4-A319-4F2D-B9D9-CA8E16E34D09}" destId="{E2EE27DF-4B21-4E31-A45D-647630E6080B}" srcOrd="5" destOrd="0" parTransId="{F2EAC336-94D8-416E-9442-A4D6C9F8B5D2}" sibTransId="{56429977-D171-46BF-9283-5818282CFBD8}"/>
+    <dgm:cxn modelId="{9970B9E4-3082-43AE-9EED-E2F698838803}" srcId="{06F25AE4-A319-4F2D-B9D9-CA8E16E34D09}" destId="{73C1CEFE-7475-4CE0-9D44-919BF97AECA3}" srcOrd="0" destOrd="0" parTransId="{223B408B-1F4E-4834-8025-D596B208C59D}" sibTransId="{DA80EC26-7A93-4149-92CE-29B8CBBBABCC}"/>
+    <dgm:cxn modelId="{00655FF0-9EB2-4034-9580-E16BA1B03207}" type="presOf" srcId="{08EBBF5C-76E1-41C4-B6DC-4E1025B069DE}" destId="{7361D7DE-4853-4FD8-B8E1-4BE6C45DC4F0}" srcOrd="0" destOrd="0" presId="urn:microsoft.com/office/officeart/2005/8/layout/vList2"/>
+    <dgm:cxn modelId="{28959CB4-E595-4D18-9FB9-47DEC934443E}" type="presParOf" srcId="{95735D56-7087-452F-B04D-9724272DCB20}" destId="{004A2D63-A834-4D6E-9977-6F469B885DDA}" srcOrd="0" destOrd="0" presId="urn:microsoft.com/office/officeart/2005/8/layout/vList2"/>
+    <dgm:cxn modelId="{495360A1-B33D-4933-806B-00D959CA5FA2}" type="presParOf" srcId="{95735D56-7087-452F-B04D-9724272DCB20}" destId="{377036A0-4F44-49E2-AF9D-52B017432CEC}" srcOrd="1" destOrd="0" presId="urn:microsoft.com/office/officeart/2005/8/layout/vList2"/>
+    <dgm:cxn modelId="{E3F1F109-25E3-4505-B3EE-DE4E2BF1B7FB}" type="presParOf" srcId="{95735D56-7087-452F-B04D-9724272DCB20}" destId="{BBED0CE2-FFAD-4E75-9809-8E864F5942E5}" srcOrd="2" destOrd="0" presId="urn:microsoft.com/office/officeart/2005/8/layout/vList2"/>
+    <dgm:cxn modelId="{31DA5666-A672-4E79-94EE-049632EB196A}" type="presParOf" srcId="{95735D56-7087-452F-B04D-9724272DCB20}" destId="{8127DFB1-6049-4A1C-90ED-756EA5D2DCDB}" srcOrd="3" destOrd="0" presId="urn:microsoft.com/office/officeart/2005/8/layout/vList2"/>
+    <dgm:cxn modelId="{3C52E2E8-6506-4CDF-AFD3-B3FC7BBA1053}" type="presParOf" srcId="{95735D56-7087-452F-B04D-9724272DCB20}" destId="{06FF5538-C590-45B5-8976-89A6A4B0AEE0}" srcOrd="4" destOrd="0" presId="urn:microsoft.com/office/officeart/2005/8/layout/vList2"/>
+    <dgm:cxn modelId="{0E1FAE41-E5A6-4C72-B607-4BD5DC80805A}" type="presParOf" srcId="{95735D56-7087-452F-B04D-9724272DCB20}" destId="{79995EDB-FAF7-46AE-A8BB-21892B54F7F8}" srcOrd="5" destOrd="0" presId="urn:microsoft.com/office/officeart/2005/8/layout/vList2"/>
+    <dgm:cxn modelId="{BCAFB95F-E503-448E-8E18-09A4F7046CC8}" type="presParOf" srcId="{95735D56-7087-452F-B04D-9724272DCB20}" destId="{72399B0C-D373-4A86-80F6-1FBFD8A65DD3}" srcOrd="6" destOrd="0" presId="urn:microsoft.com/office/officeart/2005/8/layout/vList2"/>
+    <dgm:cxn modelId="{DF28AFF8-88EF-43B6-A10C-8EFBE1C32B8E}" type="presParOf" srcId="{95735D56-7087-452F-B04D-9724272DCB20}" destId="{0680EB52-DE64-446E-8BA8-19FFC4A30509}" srcOrd="7" destOrd="0" presId="urn:microsoft.com/office/officeart/2005/8/layout/vList2"/>
+    <dgm:cxn modelId="{B72DC1D3-B181-4633-B769-DB1CF89F7D99}" type="presParOf" srcId="{95735D56-7087-452F-B04D-9724272DCB20}" destId="{7361D7DE-4853-4FD8-B8E1-4BE6C45DC4F0}" srcOrd="8" destOrd="0" presId="urn:microsoft.com/office/officeart/2005/8/layout/vList2"/>
+    <dgm:cxn modelId="{DC6548C2-C29A-4DD0-9BA8-151C8CA95DED}" type="presParOf" srcId="{95735D56-7087-452F-B04D-9724272DCB20}" destId="{1F93351C-65ED-4D6F-925E-AF82DF0C35FB}" srcOrd="9" destOrd="0" presId="urn:microsoft.com/office/officeart/2005/8/layout/vList2"/>
+    <dgm:cxn modelId="{B9BB4F5A-7E7B-4E5E-A5FA-EBA6D0D2C3D7}" type="presParOf" srcId="{95735D56-7087-452F-B04D-9724272DCB20}" destId="{69DF2F43-4DBD-435D-9F36-90A1C54EFD33}" srcOrd="10" destOrd="0" presId="urn:microsoft.com/office/officeart/2005/8/layout/vList2"/>
+    <dgm:cxn modelId="{8249D3FC-EA7A-4A05-A3C8-06AF1803755A}" type="presParOf" srcId="{95735D56-7087-452F-B04D-9724272DCB20}" destId="{5BC87031-706D-4C71-9C15-A0B6AFF6EED1}" srcOrd="11" destOrd="0" presId="urn:microsoft.com/office/officeart/2005/8/layout/vList2"/>
+    <dgm:cxn modelId="{3483C658-E69B-46B5-A224-A825ABD0F4CB}" type="presParOf" srcId="{95735D56-7087-452F-B04D-9724272DCB20}" destId="{4173CE96-7E06-4D7D-A47C-FDB580CB7D34}" srcOrd="12" destOrd="0" presId="urn:microsoft.com/office/officeart/2005/8/layout/vList2"/>
+  </dgm:cxnLst>
+  <dgm:bg/>
+  <dgm:whole>
+    <a:ln>
+      <a:noFill/>
+    </a:ln>
+  </dgm:whole>
+  <dgm:extLst>
+    <a:ext uri="http://schemas.microsoft.com/office/drawing/2008/diagram">
+      <dsp:dataModelExt xmlns:dsp="http://schemas.microsoft.com/office/drawing/2008/diagram" relId="rId7" minVer="http://schemas.openxmlformats.org/drawingml/2006/diagram"/>
+    </a:ext>
+    <a:ext uri="{C62137D5-CB1D-491B-B009-E17868A290BF}">
+      <dgm14:recolorImg xmlns:dgm14="http://schemas.microsoft.com/office/drawing/2010/diagram" val="1"/>
+    </a:ext>
+  </dgm:extLst>
+</dgm:dataModel>
+</file>
+
+<file path=ppt/diagrams/drawing1.xml><?xml version="1.0" encoding="utf-8"?>
+<dsp:drawing xmlns:dgm="http://schemas.openxmlformats.org/drawingml/2006/diagram" xmlns:dsp="http://schemas.microsoft.com/office/drawing/2008/diagram" xmlns:a="http://schemas.openxmlformats.org/drawingml/2006/main">
+  <dsp:spTree>
+    <dsp:nvGrpSpPr>
+      <dsp:cNvPr id="0" name=""/>
+      <dsp:cNvGrpSpPr/>
+    </dsp:nvGrpSpPr>
+    <dsp:grpSpPr/>
+    <dsp:sp modelId="{004A2D63-A834-4D6E-9977-6F469B885DDA}">
+      <dsp:nvSpPr>
+        <dsp:cNvPr id="0" name=""/>
+        <dsp:cNvSpPr/>
+      </dsp:nvSpPr>
+      <dsp:spPr>
+        <a:xfrm>
+          <a:off x="0" y="69893"/>
+          <a:ext cx="2827122" cy="351000"/>
+        </a:xfrm>
+        <a:prstGeom prst="roundRect">
+          <a:avLst/>
+        </a:prstGeom>
+        <a:solidFill>
+          <a:schemeClr val="lt1">
+            <a:hueOff val="0"/>
+            <a:satOff val="0"/>
+            <a:lumOff val="0"/>
+            <a:alphaOff val="0"/>
+          </a:schemeClr>
+        </a:solidFill>
+        <a:ln w="12700" cap="flat" cmpd="sng" algn="ctr">
+          <a:solidFill>
+            <a:schemeClr val="dk2">
+              <a:shade val="80000"/>
+              <a:hueOff val="0"/>
+              <a:satOff val="0"/>
+              <a:lumOff val="0"/>
+              <a:alphaOff val="0"/>
+            </a:schemeClr>
+          </a:solidFill>
+          <a:prstDash val="solid"/>
+        </a:ln>
+        <a:effectLst/>
+      </dsp:spPr>
+      <dsp:style>
+        <a:lnRef idx="2">
+          <a:scrgbClr r="0" g="0" b="0"/>
+        </a:lnRef>
+        <a:fillRef idx="1">
+          <a:scrgbClr r="0" g="0" b="0"/>
+        </a:fillRef>
+        <a:effectRef idx="0">
+          <a:scrgbClr r="0" g="0" b="0"/>
+        </a:effectRef>
+        <a:fontRef idx="minor">
+          <a:schemeClr val="lt1"/>
+        </a:fontRef>
+      </dsp:style>
+      <dsp:txBody>
+        <a:bodyPr spcFirstLastPara="0" vert="horz" wrap="square" lIns="57150" tIns="57150" rIns="57150" bIns="57150" numCol="1" spcCol="1270" anchor="ctr" anchorCtr="0">
+          <a:noAutofit/>
+        </a:bodyPr>
+        <a:lstStyle/>
+        <a:p>
+          <a:pPr marL="0" lvl="0" indent="0" algn="l" defTabSz="666750">
+            <a:lnSpc>
+              <a:spcPct val="90000"/>
+            </a:lnSpc>
+            <a:spcBef>
+              <a:spcPct val="0"/>
+            </a:spcBef>
+            <a:spcAft>
+              <a:spcPct val="35000"/>
+            </a:spcAft>
+            <a:buNone/>
+          </a:pPr>
+          <a:r>
+            <a:rPr lang="en-US" sz="1500" kern="1200" dirty="0"/>
+            <a:t>San Marino </a:t>
+          </a:r>
+        </a:p>
+      </dsp:txBody>
+      <dsp:txXfrm>
+        <a:off x="17134" y="87027"/>
+        <a:ext cx="2792854" cy="316732"/>
+      </dsp:txXfrm>
+    </dsp:sp>
+    <dsp:sp modelId="{BBED0CE2-FFAD-4E75-9809-8E864F5942E5}">
+      <dsp:nvSpPr>
+        <dsp:cNvPr id="0" name=""/>
+        <dsp:cNvSpPr/>
+      </dsp:nvSpPr>
+      <dsp:spPr>
+        <a:xfrm>
+          <a:off x="0" y="464093"/>
+          <a:ext cx="2827122" cy="351000"/>
+        </a:xfrm>
+        <a:prstGeom prst="roundRect">
+          <a:avLst/>
+        </a:prstGeom>
+        <a:solidFill>
+          <a:schemeClr val="lt1">
+            <a:hueOff val="0"/>
+            <a:satOff val="0"/>
+            <a:lumOff val="0"/>
+            <a:alphaOff val="0"/>
+          </a:schemeClr>
+        </a:solidFill>
+        <a:ln w="12700" cap="flat" cmpd="sng" algn="ctr">
+          <a:solidFill>
+            <a:schemeClr val="dk2">
+              <a:shade val="80000"/>
+              <a:hueOff val="0"/>
+              <a:satOff val="0"/>
+              <a:lumOff val="0"/>
+              <a:alphaOff val="0"/>
+            </a:schemeClr>
+          </a:solidFill>
+          <a:prstDash val="solid"/>
+        </a:ln>
+        <a:effectLst/>
+      </dsp:spPr>
+      <dsp:style>
+        <a:lnRef idx="2">
+          <a:scrgbClr r="0" g="0" b="0"/>
+        </a:lnRef>
+        <a:fillRef idx="1">
+          <a:scrgbClr r="0" g="0" b="0"/>
+        </a:fillRef>
+        <a:effectRef idx="0">
+          <a:scrgbClr r="0" g="0" b="0"/>
+        </a:effectRef>
+        <a:fontRef idx="minor">
+          <a:schemeClr val="lt1"/>
+        </a:fontRef>
+      </dsp:style>
+      <dsp:txBody>
+        <a:bodyPr spcFirstLastPara="0" vert="horz" wrap="square" lIns="57150" tIns="57150" rIns="57150" bIns="57150" numCol="1" spcCol="1270" anchor="ctr" anchorCtr="0">
+          <a:noAutofit/>
+        </a:bodyPr>
+        <a:lstStyle/>
+        <a:p>
+          <a:pPr marL="0" lvl="0" indent="0" algn="l" defTabSz="666750">
+            <a:lnSpc>
+              <a:spcPct val="90000"/>
+            </a:lnSpc>
+            <a:spcBef>
+              <a:spcPct val="0"/>
+            </a:spcBef>
+            <a:spcAft>
+              <a:spcPct val="35000"/>
+            </a:spcAft>
+            <a:buNone/>
+          </a:pPr>
+          <a:r>
+            <a:rPr lang="en-US" sz="1500" kern="1200"/>
+            <a:t>North Korea</a:t>
+          </a:r>
+        </a:p>
+      </dsp:txBody>
+      <dsp:txXfrm>
+        <a:off x="17134" y="481227"/>
+        <a:ext cx="2792854" cy="316732"/>
+      </dsp:txXfrm>
+    </dsp:sp>
+    <dsp:sp modelId="{06FF5538-C590-45B5-8976-89A6A4B0AEE0}">
+      <dsp:nvSpPr>
+        <dsp:cNvPr id="0" name=""/>
+        <dsp:cNvSpPr/>
+      </dsp:nvSpPr>
+      <dsp:spPr>
+        <a:xfrm>
+          <a:off x="0" y="858293"/>
+          <a:ext cx="2827122" cy="351000"/>
+        </a:xfrm>
+        <a:prstGeom prst="roundRect">
+          <a:avLst/>
+        </a:prstGeom>
+        <a:solidFill>
+          <a:schemeClr val="lt1">
+            <a:hueOff val="0"/>
+            <a:satOff val="0"/>
+            <a:lumOff val="0"/>
+            <a:alphaOff val="0"/>
+          </a:schemeClr>
+        </a:solidFill>
+        <a:ln w="12700" cap="flat" cmpd="sng" algn="ctr">
+          <a:solidFill>
+            <a:schemeClr val="dk2">
+              <a:shade val="80000"/>
+              <a:hueOff val="0"/>
+              <a:satOff val="0"/>
+              <a:lumOff val="0"/>
+              <a:alphaOff val="0"/>
+            </a:schemeClr>
+          </a:solidFill>
+          <a:prstDash val="solid"/>
+        </a:ln>
+        <a:effectLst/>
+      </dsp:spPr>
+      <dsp:style>
+        <a:lnRef idx="2">
+          <a:scrgbClr r="0" g="0" b="0"/>
+        </a:lnRef>
+        <a:fillRef idx="1">
+          <a:scrgbClr r="0" g="0" b="0"/>
+        </a:fillRef>
+        <a:effectRef idx="0">
+          <a:scrgbClr r="0" g="0" b="0"/>
+        </a:effectRef>
+        <a:fontRef idx="minor">
+          <a:schemeClr val="lt1"/>
+        </a:fontRef>
+      </dsp:style>
+      <dsp:txBody>
+        <a:bodyPr spcFirstLastPara="0" vert="horz" wrap="square" lIns="57150" tIns="57150" rIns="57150" bIns="57150" numCol="1" spcCol="1270" anchor="ctr" anchorCtr="0">
+          <a:noAutofit/>
+        </a:bodyPr>
+        <a:lstStyle/>
+        <a:p>
+          <a:pPr marL="0" lvl="0" indent="0" algn="l" defTabSz="666750">
+            <a:lnSpc>
+              <a:spcPct val="90000"/>
+            </a:lnSpc>
+            <a:spcBef>
+              <a:spcPct val="0"/>
+            </a:spcBef>
+            <a:spcAft>
+              <a:spcPct val="35000"/>
+            </a:spcAft>
+            <a:buNone/>
+          </a:pPr>
+          <a:r>
+            <a:rPr lang="en-US" sz="1500" kern="1200"/>
+            <a:t>Monaco</a:t>
+          </a:r>
+        </a:p>
+      </dsp:txBody>
+      <dsp:txXfrm>
+        <a:off x="17134" y="875427"/>
+        <a:ext cx="2792854" cy="316732"/>
+      </dsp:txXfrm>
+    </dsp:sp>
+    <dsp:sp modelId="{72399B0C-D373-4A86-80F6-1FBFD8A65DD3}">
+      <dsp:nvSpPr>
+        <dsp:cNvPr id="0" name=""/>
+        <dsp:cNvSpPr/>
+      </dsp:nvSpPr>
+      <dsp:spPr>
+        <a:xfrm>
+          <a:off x="0" y="1252493"/>
+          <a:ext cx="2827122" cy="351000"/>
+        </a:xfrm>
+        <a:prstGeom prst="roundRect">
+          <a:avLst/>
+        </a:prstGeom>
+        <a:solidFill>
+          <a:schemeClr val="lt1">
+            <a:hueOff val="0"/>
+            <a:satOff val="0"/>
+            <a:lumOff val="0"/>
+            <a:alphaOff val="0"/>
+          </a:schemeClr>
+        </a:solidFill>
+        <a:ln w="12700" cap="flat" cmpd="sng" algn="ctr">
+          <a:solidFill>
+            <a:schemeClr val="dk2">
+              <a:shade val="80000"/>
+              <a:hueOff val="0"/>
+              <a:satOff val="0"/>
+              <a:lumOff val="0"/>
+              <a:alphaOff val="0"/>
+            </a:schemeClr>
+          </a:solidFill>
+          <a:prstDash val="solid"/>
+        </a:ln>
+        <a:effectLst/>
+      </dsp:spPr>
+      <dsp:style>
+        <a:lnRef idx="2">
+          <a:scrgbClr r="0" g="0" b="0"/>
+        </a:lnRef>
+        <a:fillRef idx="1">
+          <a:scrgbClr r="0" g="0" b="0"/>
+        </a:fillRef>
+        <a:effectRef idx="0">
+          <a:scrgbClr r="0" g="0" b="0"/>
+        </a:effectRef>
+        <a:fontRef idx="minor">
+          <a:schemeClr val="lt1"/>
+        </a:fontRef>
+      </dsp:style>
+      <dsp:txBody>
+        <a:bodyPr spcFirstLastPara="0" vert="horz" wrap="square" lIns="57150" tIns="57150" rIns="57150" bIns="57150" numCol="1" spcCol="1270" anchor="ctr" anchorCtr="0">
+          <a:noAutofit/>
+        </a:bodyPr>
+        <a:lstStyle/>
+        <a:p>
+          <a:pPr marL="0" lvl="0" indent="0" algn="l" defTabSz="666750">
+            <a:lnSpc>
+              <a:spcPct val="90000"/>
+            </a:lnSpc>
+            <a:spcBef>
+              <a:spcPct val="0"/>
+            </a:spcBef>
+            <a:spcAft>
+              <a:spcPct val="35000"/>
+            </a:spcAft>
+            <a:buNone/>
+          </a:pPr>
+          <a:r>
+            <a:rPr lang="en-US" sz="1500" kern="1200"/>
+            <a:t>Holy See</a:t>
+          </a:r>
+        </a:p>
+      </dsp:txBody>
+      <dsp:txXfrm>
+        <a:off x="17134" y="1269627"/>
+        <a:ext cx="2792854" cy="316732"/>
+      </dsp:txXfrm>
+    </dsp:sp>
+    <dsp:sp modelId="{7361D7DE-4853-4FD8-B8E1-4BE6C45DC4F0}">
+      <dsp:nvSpPr>
+        <dsp:cNvPr id="0" name=""/>
+        <dsp:cNvSpPr/>
+      </dsp:nvSpPr>
+      <dsp:spPr>
+        <a:xfrm>
+          <a:off x="0" y="1646693"/>
+          <a:ext cx="2827122" cy="351000"/>
+        </a:xfrm>
+        <a:prstGeom prst="roundRect">
+          <a:avLst/>
+        </a:prstGeom>
+        <a:solidFill>
+          <a:schemeClr val="lt1">
+            <a:hueOff val="0"/>
+            <a:satOff val="0"/>
+            <a:lumOff val="0"/>
+            <a:alphaOff val="0"/>
+          </a:schemeClr>
+        </a:solidFill>
+        <a:ln w="12700" cap="flat" cmpd="sng" algn="ctr">
+          <a:solidFill>
+            <a:schemeClr val="dk2">
+              <a:shade val="80000"/>
+              <a:hueOff val="0"/>
+              <a:satOff val="0"/>
+              <a:lumOff val="0"/>
+              <a:alphaOff val="0"/>
+            </a:schemeClr>
+          </a:solidFill>
+          <a:prstDash val="solid"/>
+        </a:ln>
+        <a:effectLst/>
+      </dsp:spPr>
+      <dsp:style>
+        <a:lnRef idx="2">
+          <a:scrgbClr r="0" g="0" b="0"/>
+        </a:lnRef>
+        <a:fillRef idx="1">
+          <a:scrgbClr r="0" g="0" b="0"/>
+        </a:fillRef>
+        <a:effectRef idx="0">
+          <a:scrgbClr r="0" g="0" b="0"/>
+        </a:effectRef>
+        <a:fontRef idx="minor">
+          <a:schemeClr val="lt1"/>
+        </a:fontRef>
+      </dsp:style>
+      <dsp:txBody>
+        <a:bodyPr spcFirstLastPara="0" vert="horz" wrap="square" lIns="57150" tIns="57150" rIns="57150" bIns="57150" numCol="1" spcCol="1270" anchor="ctr" anchorCtr="0">
+          <a:noAutofit/>
+        </a:bodyPr>
+        <a:lstStyle/>
+        <a:p>
+          <a:pPr marL="0" lvl="0" indent="0" algn="l" defTabSz="666750">
+            <a:lnSpc>
+              <a:spcPct val="90000"/>
+            </a:lnSpc>
+            <a:spcBef>
+              <a:spcPct val="0"/>
+            </a:spcBef>
+            <a:spcAft>
+              <a:spcPct val="35000"/>
+            </a:spcAft>
+            <a:buNone/>
+          </a:pPr>
+          <a:r>
+            <a:rPr lang="en-US" sz="1500" kern="1200"/>
+            <a:t>Taiwan</a:t>
+          </a:r>
+        </a:p>
+      </dsp:txBody>
+      <dsp:txXfrm>
+        <a:off x="17134" y="1663827"/>
+        <a:ext cx="2792854" cy="316732"/>
+      </dsp:txXfrm>
+    </dsp:sp>
+    <dsp:sp modelId="{69DF2F43-4DBD-435D-9F36-90A1C54EFD33}">
+      <dsp:nvSpPr>
+        <dsp:cNvPr id="0" name=""/>
+        <dsp:cNvSpPr/>
+      </dsp:nvSpPr>
+      <dsp:spPr>
+        <a:xfrm>
+          <a:off x="0" y="2040893"/>
+          <a:ext cx="2827122" cy="351000"/>
+        </a:xfrm>
+        <a:prstGeom prst="roundRect">
+          <a:avLst/>
+        </a:prstGeom>
+        <a:solidFill>
+          <a:schemeClr val="lt1">
+            <a:hueOff val="0"/>
+            <a:satOff val="0"/>
+            <a:lumOff val="0"/>
+            <a:alphaOff val="0"/>
+          </a:schemeClr>
+        </a:solidFill>
+        <a:ln w="12700" cap="flat" cmpd="sng" algn="ctr">
+          <a:solidFill>
+            <a:schemeClr val="dk2">
+              <a:shade val="80000"/>
+              <a:hueOff val="0"/>
+              <a:satOff val="0"/>
+              <a:lumOff val="0"/>
+              <a:alphaOff val="0"/>
+            </a:schemeClr>
+          </a:solidFill>
+          <a:prstDash val="solid"/>
+        </a:ln>
+        <a:effectLst/>
+      </dsp:spPr>
+      <dsp:style>
+        <a:lnRef idx="2">
+          <a:scrgbClr r="0" g="0" b="0"/>
+        </a:lnRef>
+        <a:fillRef idx="1">
+          <a:scrgbClr r="0" g="0" b="0"/>
+        </a:fillRef>
+        <a:effectRef idx="0">
+          <a:scrgbClr r="0" g="0" b="0"/>
+        </a:effectRef>
+        <a:fontRef idx="minor">
+          <a:schemeClr val="lt1"/>
+        </a:fontRef>
+      </dsp:style>
+      <dsp:txBody>
+        <a:bodyPr spcFirstLastPara="0" vert="horz" wrap="square" lIns="57150" tIns="57150" rIns="57150" bIns="57150" numCol="1" spcCol="1270" anchor="ctr" anchorCtr="0">
+          <a:noAutofit/>
+        </a:bodyPr>
+        <a:lstStyle/>
+        <a:p>
+          <a:pPr marL="0" lvl="0" indent="0" algn="l" defTabSz="666750">
+            <a:lnSpc>
+              <a:spcPct val="90000"/>
+            </a:lnSpc>
+            <a:spcBef>
+              <a:spcPct val="0"/>
+            </a:spcBef>
+            <a:spcAft>
+              <a:spcPct val="35000"/>
+            </a:spcAft>
+            <a:buNone/>
+          </a:pPr>
+          <a:r>
+            <a:rPr lang="en-US" sz="1500" kern="1200"/>
+            <a:t>Andorra</a:t>
+          </a:r>
+        </a:p>
+      </dsp:txBody>
+      <dsp:txXfrm>
+        <a:off x="17134" y="2058027"/>
+        <a:ext cx="2792854" cy="316732"/>
+      </dsp:txXfrm>
+    </dsp:sp>
+    <dsp:sp modelId="{4173CE96-7E06-4D7D-A47C-FDB580CB7D34}">
+      <dsp:nvSpPr>
+        <dsp:cNvPr id="0" name=""/>
+        <dsp:cNvSpPr/>
+      </dsp:nvSpPr>
+      <dsp:spPr>
+        <a:xfrm>
+          <a:off x="0" y="2435093"/>
+          <a:ext cx="2827122" cy="351000"/>
+        </a:xfrm>
+        <a:prstGeom prst="roundRect">
+          <a:avLst/>
+        </a:prstGeom>
+        <a:solidFill>
+          <a:schemeClr val="lt1">
+            <a:hueOff val="0"/>
+            <a:satOff val="0"/>
+            <a:lumOff val="0"/>
+            <a:alphaOff val="0"/>
+          </a:schemeClr>
+        </a:solidFill>
+        <a:ln w="12700" cap="flat" cmpd="sng" algn="ctr">
+          <a:solidFill>
+            <a:schemeClr val="dk2">
+              <a:shade val="80000"/>
+              <a:hueOff val="0"/>
+              <a:satOff val="0"/>
+              <a:lumOff val="0"/>
+              <a:alphaOff val="0"/>
+            </a:schemeClr>
+          </a:solidFill>
+          <a:prstDash val="solid"/>
+        </a:ln>
+        <a:effectLst/>
+      </dsp:spPr>
+      <dsp:style>
+        <a:lnRef idx="2">
+          <a:scrgbClr r="0" g="0" b="0"/>
+        </a:lnRef>
+        <a:fillRef idx="1">
+          <a:scrgbClr r="0" g="0" b="0"/>
+        </a:fillRef>
+        <a:effectRef idx="0">
+          <a:scrgbClr r="0" g="0" b="0"/>
+        </a:effectRef>
+        <a:fontRef idx="minor">
+          <a:schemeClr val="lt1"/>
+        </a:fontRef>
+      </dsp:style>
+      <dsp:txBody>
+        <a:bodyPr spcFirstLastPara="0" vert="horz" wrap="square" lIns="57150" tIns="57150" rIns="57150" bIns="57150" numCol="1" spcCol="1270" anchor="ctr" anchorCtr="0">
+          <a:noAutofit/>
+        </a:bodyPr>
+        <a:lstStyle/>
+        <a:p>
+          <a:pPr marL="0" lvl="0" indent="0" algn="l" defTabSz="666750">
+            <a:lnSpc>
+              <a:spcPct val="90000"/>
+            </a:lnSpc>
+            <a:spcBef>
+              <a:spcPct val="0"/>
+            </a:spcBef>
+            <a:spcAft>
+              <a:spcPct val="35000"/>
+            </a:spcAft>
+            <a:buNone/>
+          </a:pPr>
+          <a:r>
+            <a:rPr lang="en-US" sz="1500" kern="1200"/>
+            <a:t>Liechtenstein</a:t>
+          </a:r>
+        </a:p>
+      </dsp:txBody>
+      <dsp:txXfrm>
+        <a:off x="17134" y="2452227"/>
+        <a:ext cx="2792854" cy="316732"/>
+      </dsp:txXfrm>
+    </dsp:sp>
+  </dsp:spTree>
+</dsp:drawing>
+</file>
+
+<file path=ppt/diagrams/layout1.xml><?xml version="1.0" encoding="utf-8"?>
+<dgm:layoutDef xmlns:dgm="http://schemas.openxmlformats.org/drawingml/2006/diagram" xmlns:a="http://schemas.openxmlformats.org/drawingml/2006/main" uniqueId="urn:microsoft.com/office/officeart/2005/8/layout/vList2">
+  <dgm:title val=""/>
+  <dgm:desc val=""/>
+  <dgm:catLst>
+    <dgm:cat type="list" pri="3000"/>
+    <dgm:cat type="convert" pri="1000"/>
+  </dgm:catLst>
+  <dgm:sampData>
+    <dgm:dataModel>
+      <dgm:ptLst>
+        <dgm:pt modelId="0" type="doc"/>
+        <dgm:pt modelId="1">
+          <dgm:prSet phldr="1"/>
+        </dgm:pt>
+        <dgm:pt modelId="11">
+          <dgm:prSet phldr="1"/>
+        </dgm:pt>
+        <dgm:pt modelId="2">
+          <dgm:prSet phldr="1"/>
+        </dgm:pt>
+        <dgm:pt modelId="21">
+          <dgm:prSet phldr="1"/>
+        </dgm:pt>
+      </dgm:ptLst>
+      <dgm:cxnLst>
+        <dgm:cxn modelId="4" srcId="0" destId="1" srcOrd="0" destOrd="0"/>
+        <dgm:cxn modelId="5" srcId="0" destId="2" srcOrd="1" destOrd="0"/>
+        <dgm:cxn modelId="12" srcId="1" destId="11" srcOrd="0" destOrd="0"/>
+        <dgm:cxn modelId="23" srcId="2" destId="21" srcOrd="0" destOrd="0"/>
+      </dgm:cxnLst>
+      <dgm:bg/>
+      <dgm:whole/>
+    </dgm:dataModel>
+  </dgm:sampData>
+  <dgm:styleData>
+    <dgm:dataModel>
+      <dgm:ptLst>
+        <dgm:pt modelId="0" type="doc"/>
+        <dgm:pt modelId="1"/>
+        <dgm:pt modelId="2"/>
+      </dgm:ptLst>
+      <dgm:cxnLst>
+        <dgm:cxn modelId="3" srcId="0" destId="1" srcOrd="0" destOrd="0"/>
+        <dgm:cxn modelId="4" srcId="0" destId="2" srcOrd="1" destOrd="0"/>
+      </dgm:cxnLst>
+      <dgm:bg/>
+      <dgm:whole/>
+    </dgm:dataModel>
+  </dgm:styleData>
+  <dgm:clrData>
+    <dgm:dataModel>
+      <dgm:ptLst>
+        <dgm:pt modelId="0" type="doc"/>
+        <dgm:pt modelId="1"/>
+        <dgm:pt modelId="2"/>
+        <dgm:pt modelId="3"/>
+        <dgm:pt modelId="4"/>
+      </dgm:ptLst>
+      <dgm:cxnLst>
+        <dgm:cxn modelId="5" srcId="0" destId="1" srcOrd="0" destOrd="0"/>
+        <dgm:cxn modelId="6" srcId="0" destId="2" srcOrd="1" destOrd="0"/>
+        <dgm:cxn modelId="7" srcId="0" destId="3" srcOrd="2" destOrd="0"/>
+        <dgm:cxn modelId="8" srcId="0" destId="4" srcOrd="3" destOrd="0"/>
+      </dgm:cxnLst>
+      <dgm:bg/>
+      <dgm:whole/>
+    </dgm:dataModel>
+  </dgm:clrData>
+  <dgm:layoutNode name="linear">
+    <dgm:varLst>
+      <dgm:animLvl val="lvl"/>
+      <dgm:resizeHandles val="exact"/>
+    </dgm:varLst>
+    <dgm:alg type="lin">
+      <dgm:param type="linDir" val="fromT"/>
+      <dgm:param type="vertAlign" val="mid"/>
+    </dgm:alg>
+    <dgm:shape xmlns:r="http://schemas.openxmlformats.org/officeDocument/2006/relationships" r:blip="">
+      <dgm:adjLst/>
+    </dgm:shape>
+    <dgm:presOf/>
+    <dgm:constrLst>
+      <dgm:constr type="w" for="ch" forName="parentText" refType="w"/>
+      <dgm:constr type="h" for="ch" forName="parentText" refType="primFontSz" refFor="ch" refForName="parentText" fact="0.52"/>
+      <dgm:constr type="w" for="ch" forName="childText" refType="w"/>
+      <dgm:constr type="h" for="ch" forName="childText" refType="primFontSz" refFor="ch" refForName="parentText" fact="0.46"/>
+      <dgm:constr type="h" for="ch" forName="parentText" op="equ"/>
+      <dgm:constr type="primFontSz" for="ch" forName="parentText" op="equ" val="65"/>
+      <dgm:constr type="primFontSz" for="ch" forName="childText" refType="primFontSz" refFor="ch" refForName="parentText" op="equ"/>
+      <dgm:constr type="h" for="ch" forName="spacer" refType="primFontSz" refFor="ch" refForName="parentText" fact="0.08"/>
+    </dgm:constrLst>
+    <dgm:ruleLst>
+      <dgm:rule type="primFontSz" for="ch" forName="parentText" val="5" fact="NaN" max="NaN"/>
+    </dgm:ruleLst>
+    <dgm:forEach name="Name0" axis="ch" ptType="node">
+      <dgm:layoutNode name="parentText" styleLbl="node1">
+        <dgm:varLst>
+          <dgm:chMax val="0"/>
+          <dgm:bulletEnabled val="1"/>
+        </dgm:varLst>
+        <dgm:alg type="tx">
+          <dgm:param type="parTxLTRAlign" val="l"/>
+          <dgm:param type="parTxRTLAlign" val="r"/>
+        </dgm:alg>
+        <dgm:shape xmlns:r="http://schemas.openxmlformats.org/officeDocument/2006/relationships" type="roundRect" r:blip="">
+          <dgm:adjLst/>
+        </dgm:shape>
+        <dgm:presOf axis="self"/>
+        <dgm:constrLst>
+          <dgm:constr type="tMarg" refType="primFontSz" fact="0.3"/>
+          <dgm:constr type="bMarg" refType="primFontSz" fact="0.3"/>
+          <dgm:constr type="lMarg" refType="primFontSz" fact="0.3"/>
+          <dgm:constr type="rMarg" refType="primFontSz" fact="0.3"/>
+        </dgm:constrLst>
+        <dgm:ruleLst>
+          <dgm:rule type="h" val="INF" fact="NaN" max="NaN"/>
+        </dgm:ruleLst>
+      </dgm:layoutNode>
+      <dgm:choose name="Name1">
+        <dgm:if name="Name2" axis="ch" ptType="node" func="cnt" op="gte" val="1">
+          <dgm:layoutNode name="childText" styleLbl="revTx">
+            <dgm:varLst>
+              <dgm:bulletEnabled val="1"/>
+            </dgm:varLst>
+            <dgm:alg type="tx">
+              <dgm:param type="stBulletLvl" val="1"/>
+              <dgm:param type="lnSpAfChP" val="20"/>
+            </dgm:alg>
+            <dgm:shape xmlns:r="http://schemas.openxmlformats.org/officeDocument/2006/relationships" type="rect" r:blip="">
+              <dgm:adjLst/>
+            </dgm:shape>
+            <dgm:presOf axis="des" ptType="node"/>
+            <dgm:constrLst>
+              <dgm:constr type="tMarg" refType="primFontSz" fact="0.1"/>
+              <dgm:constr type="bMarg" refType="primFontSz" fact="0.1"/>
+              <dgm:constr type="lMarg" refType="w" fact="0.09"/>
+            </dgm:constrLst>
+            <dgm:ruleLst>
+              <dgm:rule type="h" val="INF" fact="NaN" max="NaN"/>
+            </dgm:ruleLst>
+          </dgm:layoutNode>
+        </dgm:if>
+        <dgm:else name="Name3">
+          <dgm:choose name="Name4">
+            <dgm:if name="Name5" axis="par ch" ptType="doc node" func="cnt" op="gte" val="2">
+              <dgm:forEach name="Name6" axis="followSib" ptType="sibTrans" cnt="1">
+                <dgm:layoutNode name="spacer">
+                  <dgm:alg type="sp"/>
+                  <dgm:shape xmlns:r="http://schemas.openxmlformats.org/officeDocument/2006/relationships" r:blip="">
+                    <dgm:adjLst/>
+                  </dgm:shape>
+                  <dgm:presOf/>
+                  <dgm:constrLst/>
+                  <dgm:ruleLst/>
+                </dgm:layoutNode>
+              </dgm:forEach>
+            </dgm:if>
+            <dgm:else name="Name7"/>
+          </dgm:choose>
+        </dgm:else>
+      </dgm:choose>
+    </dgm:forEach>
+  </dgm:layoutNode>
+</dgm:layoutDef>
+</file>
+
+<file path=ppt/diagrams/quickStyle1.xml><?xml version="1.0" encoding="utf-8"?>
+<dgm:styleDef xmlns:dgm="http://schemas.openxmlformats.org/drawingml/2006/diagram" xmlns:a="http://schemas.openxmlformats.org/drawingml/2006/main" uniqueId="urn:microsoft.com/office/officeart/2005/8/quickstyle/simple1">
+  <dgm:title val=""/>
+  <dgm:desc val=""/>
+  <dgm:catLst>
+    <dgm:cat type="simple" pri="10100"/>
+  </dgm:catLst>
+  <dgm:scene3d>
+    <a:camera prst="orthographicFront"/>
+    <a:lightRig rig="threePt" dir="t"/>
+  </dgm:scene3d>
+  <dgm:styleLbl name="node0">
+    <dgm:scene3d>
+      <a:camera prst="orthographicFront"/>
+      <a:lightRig rig="threePt" dir="t"/>
+    </dgm:scene3d>
+    <dgm:sp3d/>
+    <dgm:txPr/>
+    <dgm:style>
+      <a:lnRef idx="2">
+        <a:scrgbClr r="0" g="0" b="0"/>
+      </a:lnRef>
+      <a:fillRef idx="1">
+        <a:scrgbClr r="0" g="0" b="0"/>
+      </a:fillRef>
+      <a:effectRef idx="0">
+        <a:scrgbClr r="0" g="0" b="0"/>
+      </a:effectRef>
+      <a:fontRef idx="minor">
+        <a:schemeClr val="lt1"/>
+      </a:fontRef>
+    </dgm:style>
+  </dgm:styleLbl>
+  <dgm:styleLbl name="lnNode1">
+    <dgm:scene3d>
+      <a:camera prst="orthographicFront"/>
+      <a:lightRig rig="threePt" dir="t"/>
+    </dgm:scene3d>
+    <dgm:sp3d/>
+    <dgm:txPr/>
+    <dgm:style>
+      <a:lnRef idx="2">
+        <a:scrgbClr r="0" g="0" b="0"/>
+      </a:lnRef>
+      <a:fillRef idx="1">
+        <a:scrgbClr r="0" g="0" b="0"/>
+      </a:fillRef>
+      <a:effectRef idx="0">
+        <a:scrgbClr r="0" g="0" b="0"/>
+      </a:effectRef>
+      <a:fontRef idx="minor">
+        <a:schemeClr val="lt1"/>
+      </a:fontRef>
+    </dgm:style>
+  </dgm:styleLbl>
+  <dgm:styleLbl name="vennNode1">
+    <dgm:scene3d>
+      <a:camera prst="orthographicFront"/>
+      <a:lightRig rig="threePt" dir="t"/>
+    </dgm:scene3d>
+    <dgm:sp3d/>
+    <dgm:txPr/>
+    <dgm:style>
+      <a:lnRef idx="2">
+        <a:scrgbClr r="0" g="0" b="0"/>
+      </a:lnRef>
+      <a:fillRef idx="1">
+        <a:scrgbClr r="0" g="0" b="0"/>
+      </a:fillRef>
+      <a:effectRef idx="0">
+        <a:scrgbClr r="0" g="0" b="0"/>
+      </a:effectRef>
+      <a:fontRef idx="minor">
+        <a:schemeClr val="tx1"/>
+      </a:fontRef>
+    </dgm:style>
+  </dgm:styleLbl>
+  <dgm:styleLbl name="alignNode1">
+    <dgm:scene3d>
+      <a:camera prst="orthographicFront"/>
+      <a:lightRig rig="threePt" dir="t"/>
+    </dgm:scene3d>
+    <dgm:sp3d/>
+    <dgm:txPr/>
+    <dgm:style>
+      <a:lnRef idx="2">
+        <a:scrgbClr r="0" g="0" b="0"/>
+      </a:lnRef>
+      <a:fillRef idx="1">
+        <a:scrgbClr r="0" g="0" b="0"/>
+      </a:fillRef>
+      <a:effectRef idx="0">
+        <a:scrgbClr r="0" g="0" b="0"/>
+      </a:effectRef>
+      <a:fontRef idx="minor">
+        <a:schemeClr val="lt1"/>
+      </a:fontRef>
+    </dgm:style>
+  </dgm:styleLbl>
+  <dgm:styleLbl name="node1">
+    <dgm:scene3d>
+      <a:camera prst="orthographicFront"/>
+      <a:lightRig rig="threePt" dir="t"/>
+    </dgm:scene3d>
+    <dgm:sp3d/>
+    <dgm:txPr/>
+    <dgm:style>
+      <a:lnRef idx="2">
+        <a:scrgbClr r="0" g="0" b="0"/>
+      </a:lnRef>
+      <a:fillRef idx="1">
+        <a:scrgbClr r="0" g="0" b="0"/>
+      </a:fillRef>
+      <a:effectRef idx="0">
+        <a:scrgbClr r="0" g="0" b="0"/>
+      </a:effectRef>
+      <a:fontRef idx="minor">
+        <a:schemeClr val="lt1"/>
+      </a:fontRef>
+    </dgm:style>
+  </dgm:styleLbl>
+  <dgm:styleLbl name="node2">
+    <dgm:scene3d>
+      <a:camera prst="orthographicFront"/>
+      <a:lightRig rig="threePt" dir="t"/>
+    </dgm:scene3d>
+    <dgm:sp3d/>
+    <dgm:txPr/>
+    <dgm:style>
+      <a:lnRef idx="2">
+        <a:scrgbClr r="0" g="0" b="0"/>
+      </a:lnRef>
+      <a:fillRef idx="1">
+        <a:scrgbClr r="0" g="0" b="0"/>
+      </a:fillRef>
+      <a:effectRef idx="0">
+        <a:scrgbClr r="0" g="0" b="0"/>
+      </a:effectRef>
+      <a:fontRef idx="minor">
+        <a:schemeClr val="lt1"/>
+      </a:fontRef>
+    </dgm:style>
+  </dgm:styleLbl>
+  <dgm:styleLbl name="node3">
+    <dgm:scene3d>
+      <a:camera prst="orthographicFront"/>
+      <a:lightRig rig="threePt" dir="t"/>
+    </dgm:scene3d>
+    <dgm:sp3d/>
+    <dgm:txPr/>
+    <dgm:style>
+      <a:lnRef idx="2">
+        <a:scrgbClr r="0" g="0" b="0"/>
+      </a:lnRef>
+      <a:fillRef idx="1">
+        <a:scrgbClr r="0" g="0" b="0"/>
+      </a:fillRef>
+      <a:effectRef idx="0">
+        <a:scrgbClr r="0" g="0" b="0"/>
+      </a:effectRef>
+      <a:fontRef idx="minor">
+        <a:schemeClr val="lt1"/>
+      </a:fontRef>
+    </dgm:style>
+  </dgm:styleLbl>
+  <dgm:styleLbl name="node4">
+    <dgm:scene3d>
+      <a:camera prst="orthographicFront"/>
+      <a:lightRig rig="threePt" dir="t"/>
+    </dgm:scene3d>
+    <dgm:sp3d/>
+    <dgm:txPr/>
+    <dgm:style>
+      <a:lnRef idx="2">
+        <a:scrgbClr r="0" g="0" b="0"/>
+      </a:lnRef>
+      <a:fillRef idx="1">
+        <a:scrgbClr r="0" g="0" b="0"/>
+      </a:fillRef>
+      <a:effectRef idx="0">
+        <a:scrgbClr r="0" g="0" b="0"/>
+      </a:effectRef>
+      <a:fontRef idx="minor">
+        <a:schemeClr val="lt1"/>
+      </a:fontRef>
+    </dgm:style>
+  </dgm:styleLbl>
+  <dgm:styleLbl name="fgImgPlace1">
+    <dgm:scene3d>
+      <a:camera prst="orthographicFront"/>
+      <a:lightRig rig="threePt" dir="t"/>
+    </dgm:scene3d>
+    <dgm:sp3d/>
+    <dgm:txPr/>
+    <dgm:style>
+      <a:lnRef idx="2">
+        <a:scrgbClr r="0" g="0" b="0"/>
+      </a:lnRef>
+      <a:fillRef idx="1">
+        <a:scrgbClr r="0" g="0" b="0"/>
+      </a:fillRef>
+      <a:effectRef idx="0">
+        <a:scrgbClr r="0" g="0" b="0"/>
+      </a:effectRef>
+      <a:fontRef idx="minor"/>
+    </dgm:style>
+  </dgm:styleLbl>
+  <dgm:styleLbl name="alignImgPlace1">
+    <dgm:scene3d>
+      <a:camera prst="orthographicFront"/>
+      <a:lightRig rig="threePt" dir="t"/>
+    </dgm:scene3d>
+    <dgm:sp3d/>
+    <dgm:txPr/>
+    <dgm:style>
+      <a:lnRef idx="2">
+        <a:scrgbClr r="0" g="0" b="0"/>
+      </a:lnRef>
+      <a:fillRef idx="1">
+        <a:scrgbClr r="0" g="0" b="0"/>
+      </a:fillRef>
+      <a:effectRef idx="0">
+        <a:scrgbClr r="0" g="0" b="0"/>
+      </a:effectRef>
+      <a:fontRef idx="minor"/>
+    </dgm:style>
+  </dgm:styleLbl>
+  <dgm:styleLbl name="bgImgPlace1">
+    <dgm:scene3d>
+      <a:camera prst="orthographicFront"/>
+      <a:lightRig rig="threePt" dir="t"/>
+    </dgm:scene3d>
+    <dgm:sp3d/>
+    <dgm:txPr/>
+    <dgm:style>
+      <a:lnRef idx="2">
+        <a:scrgbClr r="0" g="0" b="0"/>
+      </a:lnRef>
+      <a:fillRef idx="1">
+        <a:scrgbClr r="0" g="0" b="0"/>
+      </a:fillRef>
+      <a:effectRef idx="0">
+        <a:scrgbClr r="0" g="0" b="0"/>
+      </a:effectRef>
+      <a:fontRef idx="minor"/>
+    </dgm:style>
+  </dgm:styleLbl>
+  <dgm:styleLbl name="sibTrans2D1">
+    <dgm:scene3d>
+      <a:camera prst="orthographicFront"/>
+      <a:lightRig rig="threePt" dir="t"/>
+    </dgm:scene3d>
+    <dgm:sp3d/>
+    <dgm:txPr/>
+    <dgm:style>
+      <a:lnRef idx="0">
+        <a:scrgbClr r="0" g="0" b="0"/>
+      </a:lnRef>
+      <a:fillRef idx="1">
+        <a:scrgbClr r="0" g="0" b="0"/>
+      </a:fillRef>
+      <a:effectRef idx="0">
+        <a:scrgbClr r="0" g="0" b="0"/>
+      </a:effectRef>
+      <a:fontRef idx="minor">
+        <a:schemeClr val="lt1"/>
+      </a:fontRef>
+    </dgm:style>
+  </dgm:styleLbl>
+  <dgm:styleLbl name="fgSibTrans2D1">
+    <dgm:scene3d>
+      <a:camera prst="orthographicFront"/>
+      <a:lightRig rig="threePt" dir="t"/>
+    </dgm:scene3d>
+    <dgm:sp3d/>
+    <dgm:txPr/>
+    <dgm:style>
+      <a:lnRef idx="0">
+        <a:scrgbClr r="0" g="0" b="0"/>
+      </a:lnRef>
+      <a:fillRef idx="1">
+        <a:scrgbClr r="0" g="0" b="0"/>
+      </a:fillRef>
+      <a:effectRef idx="0">
+        <a:scrgbClr r="0" g="0" b="0"/>
+      </a:effectRef>
+      <a:fontRef idx="minor">
+        <a:schemeClr val="lt1"/>
+      </a:fontRef>
+    </dgm:style>
+  </dgm:styleLbl>
+  <dgm:styleLbl name="bgSibTrans2D1">
+    <dgm:scene3d>
+      <a:camera prst="orthographicFront"/>
+      <a:lightRig rig="threePt" dir="t"/>
+    </dgm:scene3d>
+    <dgm:sp3d/>
+    <dgm:txPr/>
+    <dgm:style>
+      <a:lnRef idx="0">
+        <a:scrgbClr r="0" g="0" b="0"/>
+      </a:lnRef>
+      <a:fillRef idx="1">
+        <a:scrgbClr r="0" g="0" b="0"/>
+      </a:fillRef>
+      <a:effectRef idx="0">
+        <a:scrgbClr r="0" g="0" b="0"/>
+      </a:effectRef>
+      <a:fontRef idx="minor">
+        <a:schemeClr val="lt1"/>
+      </a:fontRef>
+    </dgm:style>
+  </dgm:styleLbl>
+  <dgm:styleLbl name="sibTrans1D1">
+    <dgm:scene3d>
+      <a:camera prst="orthographicFront"/>
+      <a:lightRig rig="threePt" dir="t"/>
+    </dgm:scene3d>
+    <dgm:sp3d/>
+    <dgm:txPr/>
+    <dgm:style>
+      <a:lnRef idx="1">
+        <a:scrgbClr r="0" g="0" b="0"/>
+      </a:lnRef>
+      <a:fillRef idx="0">
+        <a:scrgbClr r="0" g="0" b="0"/>
+      </a:fillRef>
+      <a:effectRef idx="0">
+        <a:scrgbClr r="0" g="0" b="0"/>
+      </a:effectRef>
+      <a:fontRef idx="minor"/>
+    </dgm:style>
+  </dgm:styleLbl>
+  <dgm:styleLbl name="callout">
+    <dgm:scene3d>
+      <a:camera prst="orthographicFront"/>
+      <a:lightRig rig="threePt" dir="t"/>
+    </dgm:scene3d>
+    <dgm:sp3d/>
+    <dgm:txPr/>
+    <dgm:style>
+      <a:lnRef idx="2">
+        <a:scrgbClr r="0" g="0" b="0"/>
+      </a:lnRef>
+      <a:fillRef idx="1">
+        <a:scrgbClr r="0" g="0" b="0"/>
+      </a:fillRef>
+      <a:effectRef idx="0">
+        <a:scrgbClr r="0" g="0" b="0"/>
+      </a:effectRef>
+      <a:fontRef idx="minor"/>
+    </dgm:style>
+  </dgm:styleLbl>
+  <dgm:styleLbl name="asst0">
+    <dgm:scene3d>
+      <a:camera prst="orthographicFront"/>
+      <a:lightRig rig="threePt" dir="t"/>
+    </dgm:scene3d>
+    <dgm:sp3d/>
+    <dgm:txPr/>
+    <dgm:style>
+      <a:lnRef idx="2">
+        <a:scrgbClr r="0" g="0" b="0"/>
+      </a:lnRef>
+      <a:fillRef idx="1">
+        <a:scrgbClr r="0" g="0" b="0"/>
+      </a:fillRef>
+      <a:effectRef idx="0">
+        <a:scrgbClr r="0" g="0" b="0"/>
+      </a:effectRef>
+      <a:fontRef idx="minor">
+        <a:schemeClr val="lt1"/>
+      </a:fontRef>
+    </dgm:style>
+  </dgm:styleLbl>
+  <dgm:styleLbl name="asst1">
+    <dgm:scene3d>
+      <a:camera prst="orthographicFront"/>
+      <a:lightRig rig="threePt" dir="t"/>
+    </dgm:scene3d>
+    <dgm:sp3d/>
+    <dgm:txPr/>
+    <dgm:style>
+      <a:lnRef idx="2">
+        <a:scrgbClr r="0" g="0" b="0"/>
+      </a:lnRef>
+      <a:fillRef idx="1">
+        <a:scrgbClr r="0" g="0" b="0"/>
+      </a:fillRef>
+      <a:effectRef idx="0">
+        <a:scrgbClr r="0" g="0" b="0"/>
+      </a:effectRef>
+      <a:fontRef idx="minor">
+        <a:schemeClr val="lt1"/>
+      </a:fontRef>
+    </dgm:style>
+  </dgm:styleLbl>
+  <dgm:styleLbl name="asst2">
+    <dgm:scene3d>
+      <a:camera prst="orthographicFront"/>
+      <a:lightRig rig="threePt" dir="t"/>
+    </dgm:scene3d>
+    <dgm:sp3d/>
+    <dgm:txPr/>
+    <dgm:style>
+      <a:lnRef idx="2">
+        <a:scrgbClr r="0" g="0" b="0"/>
+      </a:lnRef>
+      <a:fillRef idx="1">
+        <a:scrgbClr r="0" g="0" b="0"/>
+      </a:fillRef>
+      <a:effectRef idx="0">
+        <a:scrgbClr r="0" g="0" b="0"/>
+      </a:effectRef>
+      <a:fontRef idx="minor">
+        <a:schemeClr val="lt1"/>
+      </a:fontRef>
+    </dgm:style>
+  </dgm:styleLbl>
+  <dgm:styleLbl name="asst3">
+    <dgm:scene3d>
+      <a:camera prst="orthographicFront"/>
+      <a:lightRig rig="threePt" dir="t"/>
+    </dgm:scene3d>
+    <dgm:sp3d/>
+    <dgm:txPr/>
+    <dgm:style>
+      <a:lnRef idx="2">
+        <a:scrgbClr r="0" g="0" b="0"/>
+      </a:lnRef>
+      <a:fillRef idx="1">
+        <a:scrgbClr r="0" g="0" b="0"/>
+      </a:fillRef>
+      <a:effectRef idx="0">
+        <a:scrgbClr r="0" g="0" b="0"/>
+      </a:effectRef>
+      <a:fontRef idx="minor">
+        <a:schemeClr val="lt1"/>
+      </a:fontRef>
+    </dgm:style>
+  </dgm:styleLbl>
+  <dgm:styleLbl name="asst4">
+    <dgm:scene3d>
+      <a:camera prst="orthographicFront"/>
+      <a:lightRig rig="threePt" dir="t"/>
+    </dgm:scene3d>
+    <dgm:sp3d/>
+    <dgm:txPr/>
+    <dgm:style>
+      <a:lnRef idx="2">
+        <a:scrgbClr r="0" g="0" b="0"/>
+      </a:lnRef>
+      <a:fillRef idx="1">
+        <a:scrgbClr r="0" g="0" b="0"/>
+      </a:fillRef>
+      <a:effectRef idx="0">
+        <a:scrgbClr r="0" g="0" b="0"/>
+      </a:effectRef>
+      <a:fontRef idx="minor">
+        <a:schemeClr val="lt1"/>
+      </a:fontRef>
+    </dgm:style>
+  </dgm:styleLbl>
+  <dgm:styleLbl name="parChTrans2D1">
+    <dgm:scene3d>
+      <a:camera prst="orthographicFront"/>
+      <a:lightRig rig="threePt" dir="t"/>
+    </dgm:scene3d>
+    <dgm:sp3d/>
+    <dgm:txPr/>
+    <dgm:style>
+      <a:lnRef idx="2">
+        <a:scrgbClr r="0" g="0" b="0"/>
+      </a:lnRef>
+      <a:fillRef idx="1">
+        <a:scrgbClr r="0" g="0" b="0"/>
+      </a:fillRef>
+      <a:effectRef idx="0">
+        <a:scrgbClr r="0" g="0" b="0"/>
+      </a:effectRef>
+      <a:fontRef idx="minor">
+        <a:schemeClr val="lt1"/>
+      </a:fontRef>
+    </dgm:style>
+  </dgm:styleLbl>
+  <dgm:styleLbl name="parChTrans2D2">
+    <dgm:scene3d>
+      <a:camera prst="orthographicFront"/>
+      <a:lightRig rig="threePt" dir="t"/>
+    </dgm:scene3d>
+    <dgm:sp3d/>
+    <dgm:txPr/>
+    <dgm:style>
+      <a:lnRef idx="2">
+        <a:scrgbClr r="0" g="0" b="0"/>
+      </a:lnRef>
+      <a:fillRef idx="1">
+        <a:scrgbClr r="0" g="0" b="0"/>
+      </a:fillRef>
+      <a:effectRef idx="0">
+        <a:scrgbClr r="0" g="0" b="0"/>
+      </a:effectRef>
+      <a:fontRef idx="minor">
+        <a:schemeClr val="lt1"/>
+      </a:fontRef>
+    </dgm:style>
+  </dgm:styleLbl>
+  <dgm:styleLbl name="parChTrans2D3">
+    <dgm:scene3d>
+      <a:camera prst="orthographicFront"/>
+      <a:lightRig rig="threePt" dir="t"/>
+    </dgm:scene3d>
+    <dgm:sp3d/>
+    <dgm:txPr/>
+    <dgm:style>
+      <a:lnRef idx="2">
+        <a:scrgbClr r="0" g="0" b="0"/>
+      </a:lnRef>
+      <a:fillRef idx="1">
+        <a:scrgbClr r="0" g="0" b="0"/>
+      </a:fillRef>
+      <a:effectRef idx="0">
+        <a:scrgbClr r="0" g="0" b="0"/>
+      </a:effectRef>
+      <a:fontRef idx="minor">
+        <a:schemeClr val="lt1"/>
+      </a:fontRef>
+    </dgm:style>
+  </dgm:styleLbl>
+  <dgm:styleLbl name="parChTrans2D4">
+    <dgm:scene3d>
+      <a:camera prst="orthographicFront"/>
+      <a:lightRig rig="threePt" dir="t"/>
+    </dgm:scene3d>
+    <dgm:sp3d/>
+    <dgm:txPr/>
+    <dgm:style>
+      <a:lnRef idx="2">
+        <a:scrgbClr r="0" g="0" b="0"/>
+      </a:lnRef>
+      <a:fillRef idx="1">
+        <a:scrgbClr r="0" g="0" b="0"/>
+      </a:fillRef>
+      <a:effectRef idx="0">
+        <a:scrgbClr r="0" g="0" b="0"/>
+      </a:effectRef>
+      <a:fontRef idx="minor">
+        <a:schemeClr val="lt1"/>
+      </a:fontRef>
+    </dgm:style>
+  </dgm:styleLbl>
+  <dgm:styleLbl name="parChTrans1D1">
+    <dgm:scene3d>
+      <a:camera prst="orthographicFront"/>
+      <a:lightRig rig="threePt" dir="t"/>
+    </dgm:scene3d>
+    <dgm:sp3d/>
+    <dgm:txPr/>
+    <dgm:style>
+      <a:lnRef idx="2">
+        <a:scrgbClr r="0" g="0" b="0"/>
+      </a:lnRef>
+      <a:fillRef idx="0">
+        <a:scrgbClr r="0" g="0" b="0"/>
+      </a:fillRef>
+      <a:effectRef idx="0">
+        <a:scrgbClr r="0" g="0" b="0"/>
+      </a:effectRef>
+      <a:fontRef idx="minor"/>
+    </dgm:style>
+  </dgm:styleLbl>
+  <dgm:styleLbl name="parChTrans1D2">
+    <dgm:scene3d>
+      <a:camera prst="orthographicFront"/>
+      <a:lightRig rig="threePt" dir="t"/>
+    </dgm:scene3d>
+    <dgm:sp3d/>
+    <dgm:txPr/>
+    <dgm:style>
+      <a:lnRef idx="2">
+        <a:scrgbClr r="0" g="0" b="0"/>
+      </a:lnRef>
+      <a:fillRef idx="0">
+        <a:scrgbClr r="0" g="0" b="0"/>
+      </a:fillRef>
+      <a:effectRef idx="0">
+        <a:scrgbClr r="0" g="0" b="0"/>
+      </a:effectRef>
+      <a:fontRef idx="minor"/>
+    </dgm:style>
+  </dgm:styleLbl>
+  <dgm:styleLbl name="parChTrans1D3">
+    <dgm:scene3d>
+      <a:camera prst="orthographicFront"/>
+      <a:lightRig rig="threePt" dir="t"/>
+    </dgm:scene3d>
+    <dgm:sp3d/>
+    <dgm:txPr/>
+    <dgm:style>
+      <a:lnRef idx="2">
+        <a:scrgbClr r="0" g="0" b="0"/>
+      </a:lnRef>
+      <a:fillRef idx="0">
+        <a:scrgbClr r="0" g="0" b="0"/>
+      </a:fillRef>
+      <a:effectRef idx="0">
+        <a:scrgbClr r="0" g="0" b="0"/>
+      </a:effectRef>
+      <a:fontRef idx="minor"/>
+    </dgm:style>
+  </dgm:styleLbl>
+  <dgm:styleLbl name="parChTrans1D4">
+    <dgm:scene3d>
+      <a:camera prst="orthographicFront"/>
+      <a:lightRig rig="threePt" dir="t"/>
+    </dgm:scene3d>
+    <dgm:sp3d/>
+    <dgm:txPr/>
+    <dgm:style>
+      <a:lnRef idx="2">
+        <a:scrgbClr r="0" g="0" b="0"/>
+      </a:lnRef>
+      <a:fillRef idx="0">
+        <a:scrgbClr r="0" g="0" b="0"/>
+      </a:fillRef>
+      <a:effectRef idx="0">
+        <a:scrgbClr r="0" g="0" b="0"/>
+      </a:effectRef>
+      <a:fontRef idx="minor"/>
+    </dgm:style>
+  </dgm:styleLbl>
+  <dgm:styleLbl name="fgAcc1">
+    <dgm:scene3d>
+      <a:camera prst="orthographicFront"/>
+      <a:lightRig rig="threePt" dir="t"/>
+    </dgm:scene3d>
+    <dgm:sp3d/>
+    <dgm:txPr/>
+    <dgm:style>
+      <a:lnRef idx="2">
+        <a:scrgbClr r="0" g="0" b="0"/>
+      </a:lnRef>
+      <a:fillRef idx="1">
+        <a:scrgbClr r="0" g="0" b="0"/>
+      </a:fillRef>
+      <a:effectRef idx="0">
+        <a:scrgbClr r="0" g="0" b="0"/>
+      </a:effectRef>
+      <a:fontRef idx="minor"/>
+    </dgm:style>
+  </dgm:styleLbl>
+  <dgm:styleLbl name="conFgAcc1">
+    <dgm:scene3d>
+      <a:camera prst="orthographicFront"/>
+      <a:lightRig rig="threePt" dir="t"/>
+    </dgm:scene3d>
+    <dgm:sp3d/>
+    <dgm:txPr/>
+    <dgm:style>
+      <a:lnRef idx="2">
+        <a:scrgbClr r="0" g="0" b="0"/>
+      </a:lnRef>
+      <a:fillRef idx="1">
+        <a:scrgbClr r="0" g="0" b="0"/>
+      </a:fillRef>
+      <a:effectRef idx="0">
+        <a:scrgbClr r="0" g="0" b="0"/>
+      </a:effectRef>
+      <a:fontRef idx="minor"/>
+    </dgm:style>
+  </dgm:styleLbl>
+  <dgm:styleLbl name="alignAcc1">
+    <dgm:scene3d>
+      <a:camera prst="orthographicFront"/>
+      <a:lightRig rig="threePt" dir="t"/>
+    </dgm:scene3d>
+    <dgm:sp3d/>
+    <dgm:txPr/>
+    <dgm:style>
+      <a:lnRef idx="2">
+        <a:scrgbClr r="0" g="0" b="0"/>
+      </a:lnRef>
+      <a:fillRef idx="1">
+        <a:scrgbClr r="0" g="0" b="0"/>
+      </a:fillRef>
+      <a:effectRef idx="0">
+        <a:scrgbClr r="0" g="0" b="0"/>
+      </a:effectRef>
+      <a:fontRef idx="minor"/>
+    </dgm:style>
+  </dgm:styleLbl>
+  <dgm:styleLbl name="trAlignAcc1">
+    <dgm:scene3d>
+      <a:camera prst="orthographicFront"/>
+      <a:lightRig rig="threePt" dir="t"/>
+    </dgm:scene3d>
+    <dgm:sp3d/>
+    <dgm:txPr/>
+    <dgm:style>
+      <a:lnRef idx="1">
+        <a:scrgbClr r="0" g="0" b="0"/>
+      </a:lnRef>
+      <a:fillRef idx="1">
+        <a:scrgbClr r="0" g="0" b="0"/>
+      </a:fillRef>
+      <a:effectRef idx="0">
+        <a:scrgbClr r="0" g="0" b="0"/>
+      </a:effectRef>
+      <a:fontRef idx="minor"/>
+    </dgm:style>
+  </dgm:styleLbl>
+  <dgm:styleLbl name="bgAcc1">
+    <dgm:scene3d>
+      <a:camera prst="orthographicFront"/>
+      <a:lightRig rig="threePt" dir="t"/>
+    </dgm:scene3d>
+    <dgm:sp3d/>
+    <dgm:txPr/>
+    <dgm:style>
+      <a:lnRef idx="2">
+        <a:scrgbClr r="0" g="0" b="0"/>
+      </a:lnRef>
+      <a:fillRef idx="1">
+        <a:scrgbClr r="0" g="0" b="0"/>
+      </a:fillRef>
+      <a:effectRef idx="0">
+        <a:scrgbClr r="0" g="0" b="0"/>
+      </a:effectRef>
+      <a:fontRef idx="minor"/>
+    </dgm:style>
+  </dgm:styleLbl>
+  <dgm:styleLbl name="solidFgAcc1">
+    <dgm:scene3d>
+      <a:camera prst="orthographicFront"/>
+      <a:lightRig rig="threePt" dir="t"/>
+    </dgm:scene3d>
+    <dgm:sp3d/>
+    <dgm:txPr/>
+    <dgm:style>
+      <a:lnRef idx="2">
+        <a:scrgbClr r="0" g="0" b="0"/>
+      </a:lnRef>
+      <a:fillRef idx="1">
+        <a:scrgbClr r="0" g="0" b="0"/>
+      </a:fillRef>
+      <a:effectRef idx="0">
+        <a:scrgbClr r="0" g="0" b="0"/>
+      </a:effectRef>
+      <a:fontRef idx="minor"/>
+    </dgm:style>
+  </dgm:styleLbl>
+  <dgm:styleLbl name="solidAlignAcc1">
+    <dgm:scene3d>
+      <a:camera prst="orthographicFront"/>
+      <a:lightRig rig="threePt" dir="t"/>
+    </dgm:scene3d>
+    <dgm:sp3d/>
+    <dgm:txPr/>
+    <dgm:style>
+      <a:lnRef idx="2">
+        <a:scrgbClr r="0" g="0" b="0"/>
+      </a:lnRef>
+      <a:fillRef idx="1">
+        <a:scrgbClr r="0" g="0" b="0"/>
+      </a:fillRef>
+      <a:effectRef idx="0">
+        <a:scrgbClr r="0" g="0" b="0"/>
+      </a:effectRef>
+      <a:fontRef idx="minor"/>
+    </dgm:style>
+  </dgm:styleLbl>
+  <dgm:styleLbl name="solidBgAcc1">
+    <dgm:scene3d>
+      <a:camera prst="orthographicFront"/>
+      <a:lightRig rig="threePt" dir="t"/>
+    </dgm:scene3d>
+    <dgm:sp3d/>
+    <dgm:txPr/>
+    <dgm:style>
+      <a:lnRef idx="2">
+        <a:scrgbClr r="0" g="0" b="0"/>
+      </a:lnRef>
+      <a:fillRef idx="1">
+        <a:scrgbClr r="0" g="0" b="0"/>
+      </a:fillRef>
+      <a:effectRef idx="0">
+        <a:scrgbClr r="0" g="0" b="0"/>
+      </a:effectRef>
+      <a:fontRef idx="minor"/>
+    </dgm:style>
+  </dgm:styleLbl>
+  <dgm:styleLbl name="fgAccFollowNode1">
+    <dgm:scene3d>
+      <a:camera prst="orthographicFront"/>
+      <a:lightRig rig="threePt" dir="t"/>
+    </dgm:scene3d>
+    <dgm:sp3d/>
+    <dgm:txPr/>
+    <dgm:style>
+      <a:lnRef idx="2">
+        <a:scrgbClr r="0" g="0" b="0"/>
+      </a:lnRef>
+      <a:fillRef idx="1">
+        <a:scrgbClr r="0" g="0" b="0"/>
+      </a:fillRef>
+      <a:effectRef idx="0">
+        <a:scrgbClr r="0" g="0" b="0"/>
+      </a:effectRef>
+      <a:fontRef idx="minor"/>
+    </dgm:style>
+  </dgm:styleLbl>
+  <dgm:styleLbl name="alignAccFollowNode1">
+    <dgm:scene3d>
+      <a:camera prst="orthographicFront"/>
+      <a:lightRig rig="threePt" dir="t"/>
+    </dgm:scene3d>
+    <dgm:sp3d/>
+    <dgm:txPr/>
+    <dgm:style>
+      <a:lnRef idx="2">
+        <a:scrgbClr r="0" g="0" b="0"/>
+      </a:lnRef>
+      <a:fillRef idx="1">
+        <a:scrgbClr r="0" g="0" b="0"/>
+      </a:fillRef>
+      <a:effectRef idx="0">
+        <a:scrgbClr r="0" g="0" b="0"/>
+      </a:effectRef>
+      <a:fontRef idx="minor"/>
+    </dgm:style>
+  </dgm:styleLbl>
+  <dgm:styleLbl name="bgAccFollowNode1">
+    <dgm:scene3d>
+      <a:camera prst="orthographicFront"/>
+      <a:lightRig rig="threePt" dir="t"/>
+    </dgm:scene3d>
+    <dgm:sp3d/>
+    <dgm:txPr/>
+    <dgm:style>
+      <a:lnRef idx="2">
+        <a:scrgbClr r="0" g="0" b="0"/>
+      </a:lnRef>
+      <a:fillRef idx="1">
+        <a:scrgbClr r="0" g="0" b="0"/>
+      </a:fillRef>
+      <a:effectRef idx="0">
+        <a:scrgbClr r="0" g="0" b="0"/>
+      </a:effectRef>
+      <a:fontRef idx="minor"/>
+    </dgm:style>
+  </dgm:styleLbl>
+  <dgm:styleLbl name="fgAcc0">
+    <dgm:scene3d>
+      <a:camera prst="orthographicFront"/>
+      <a:lightRig rig="threePt" dir="t"/>
+    </dgm:scene3d>
+    <dgm:sp3d/>
+    <dgm:txPr/>
+    <dgm:style>
+      <a:lnRef idx="2">
+        <a:scrgbClr r="0" g="0" b="0"/>
+      </a:lnRef>
+      <a:fillRef idx="1">
+        <a:scrgbClr r="0" g="0" b="0"/>
+      </a:fillRef>
+      <a:effectRef idx="0">
+        <a:scrgbClr r="0" g="0" b="0"/>
+      </a:effectRef>
+      <a:fontRef idx="minor"/>
+    </dgm:style>
+  </dgm:styleLbl>
+  <dgm:styleLbl name="fgAcc2">
+    <dgm:scene3d>
+      <a:camera prst="orthographicFront"/>
+      <a:lightRig rig="threePt" dir="t"/>
+    </dgm:scene3d>
+    <dgm:sp3d/>
+    <dgm:txPr/>
+    <dgm:style>
+      <a:lnRef idx="2">
+        <a:scrgbClr r="0" g="0" b="0"/>
+      </a:lnRef>
+      <a:fillRef idx="1">
+        <a:scrgbClr r="0" g="0" b="0"/>
+      </a:fillRef>
+      <a:effectRef idx="0">
+        <a:scrgbClr r="0" g="0" b="0"/>
+      </a:effectRef>
+      <a:fontRef idx="minor"/>
+    </dgm:style>
+  </dgm:styleLbl>
+  <dgm:styleLbl name="fgAcc3">
+    <dgm:scene3d>
+      <a:camera prst="orthographicFront"/>
+      <a:lightRig rig="threePt" dir="t"/>
+    </dgm:scene3d>
+    <dgm:sp3d/>
+    <dgm:txPr/>
+    <dgm:style>
+      <a:lnRef idx="2">
+        <a:scrgbClr r="0" g="0" b="0"/>
+      </a:lnRef>
+      <a:fillRef idx="1">
+        <a:scrgbClr r="0" g="0" b="0"/>
+      </a:fillRef>
+      <a:effectRef idx="0">
+        <a:scrgbClr r="0" g="0" b="0"/>
+      </a:effectRef>
+      <a:fontRef idx="minor"/>
+    </dgm:style>
+  </dgm:styleLbl>
+  <dgm:styleLbl name="fgAcc4">
+    <dgm:scene3d>
+      <a:camera prst="orthographicFront"/>
+      <a:lightRig rig="threePt" dir="t"/>
+    </dgm:scene3d>
+    <dgm:sp3d/>
+    <dgm:txPr/>
+    <dgm:style>
+      <a:lnRef idx="2">
+        <a:scrgbClr r="0" g="0" b="0"/>
+      </a:lnRef>
+      <a:fillRef idx="1">
+        <a:scrgbClr r="0" g="0" b="0"/>
+      </a:fillRef>
+      <a:effectRef idx="0">
+        <a:scrgbClr r="0" g="0" b="0"/>
+      </a:effectRef>
+      <a:fontRef idx="minor"/>
+    </dgm:style>
+  </dgm:styleLbl>
+  <dgm:styleLbl name="bgShp">
+    <dgm:scene3d>
+      <a:camera prst="orthographicFront"/>
+      <a:lightRig rig="threePt" dir="t"/>
+    </dgm:scene3d>
+    <dgm:sp3d/>
+    <dgm:txPr/>
+    <dgm:style>
+      <a:lnRef idx="0">
+        <a:scrgbClr r="0" g="0" b="0"/>
+      </a:lnRef>
+      <a:fillRef idx="1">
+        <a:scrgbClr r="0" g="0" b="0"/>
+      </a:fillRef>
+      <a:effectRef idx="0">
+        <a:scrgbClr r="0" g="0" b="0"/>
+      </a:effectRef>
+      <a:fontRef idx="minor"/>
+    </dgm:style>
+  </dgm:styleLbl>
+  <dgm:styleLbl name="dkBgShp">
+    <dgm:scene3d>
+      <a:camera prst="orthographicFront"/>
+      <a:lightRig rig="threePt" dir="t"/>
+    </dgm:scene3d>
+    <dgm:sp3d/>
+    <dgm:txPr/>
+    <dgm:style>
+      <a:lnRef idx="0">
+        <a:scrgbClr r="0" g="0" b="0"/>
+      </a:lnRef>
+      <a:fillRef idx="1">
+        <a:scrgbClr r="0" g="0" b="0"/>
+      </a:fillRef>
+      <a:effectRef idx="0">
+        <a:scrgbClr r="0" g="0" b="0"/>
+      </a:effectRef>
+      <a:fontRef idx="minor"/>
+    </dgm:style>
+  </dgm:styleLbl>
+  <dgm:styleLbl name="trBgShp">
+    <dgm:scene3d>
+      <a:camera prst="orthographicFront"/>
+      <a:lightRig rig="threePt" dir="t"/>
+    </dgm:scene3d>
+    <dgm:sp3d/>
+    <dgm:txPr/>
+    <dgm:style>
+      <a:lnRef idx="0">
+        <a:scrgbClr r="0" g="0" b="0"/>
+      </a:lnRef>
+      <a:fillRef idx="1">
+        <a:scrgbClr r="0" g="0" b="0"/>
+      </a:fillRef>
+      <a:effectRef idx="0">
+        <a:scrgbClr r="0" g="0" b="0"/>
+      </a:effectRef>
+      <a:fontRef idx="minor"/>
+    </dgm:style>
+  </dgm:styleLbl>
+  <dgm:styleLbl name="fgShp">
+    <dgm:scene3d>
+      <a:camera prst="orthographicFront"/>
+      <a:lightRig rig="threePt" dir="t"/>
+    </dgm:scene3d>
+    <dgm:sp3d/>
+    <dgm:txPr/>
+    <dgm:style>
+      <a:lnRef idx="2">
+        <a:scrgbClr r="0" g="0" b="0"/>
+      </a:lnRef>
+      <a:fillRef idx="1">
+        <a:scrgbClr r="0" g="0" b="0"/>
+      </a:fillRef>
+      <a:effectRef idx="0">
+        <a:scrgbClr r="0" g="0" b="0"/>
+      </a:effectRef>
+      <a:fontRef idx="minor"/>
+    </dgm:style>
+  </dgm:styleLbl>
+  <dgm:styleLbl name="revTx">
+    <dgm:scene3d>
+      <a:camera prst="orthographicFront"/>
+      <a:lightRig rig="threePt" dir="t"/>
+    </dgm:scene3d>
+    <dgm:sp3d/>
+    <dgm:txPr/>
+    <dgm:style>
+      <a:lnRef idx="0">
+        <a:scrgbClr r="0" g="0" b="0"/>
+      </a:lnRef>
+      <a:fillRef idx="0">
+        <a:scrgbClr r="0" g="0" b="0"/>
+      </a:fillRef>
+      <a:effectRef idx="0">
+        <a:scrgbClr r="0" g="0" b="0"/>
+      </a:effectRef>
+      <a:fontRef idx="minor"/>
+    </dgm:style>
+  </dgm:styleLbl>
+</dgm:styleDef>
+</file>
+
 <file path=ppt/notesMasters/notesMaster1.xml><?xml version="1.0" encoding="utf-8"?>
 <p:notesMaster xmlns:a="http://schemas.openxmlformats.org/drawingml/2006/main" xmlns:r="http://schemas.openxmlformats.org/officeDocument/2006/relationships" xmlns:p="http://schemas.openxmlformats.org/presentationml/2006/main">
   <p:cSld>
@@ -1010,7 +3986,7 @@
           <a:p>
             <a:fld id="{AAC38DCF-7326-4BFE-88EF-51B0A6D68ED0}" type="datetimeFigureOut">
               <a:rPr lang="en-US" smtClean="0"/>
-              <a:t>7/12/2026</a:t>
+              <a:t>7/13/2026</a:t>
             </a:fld>
             <a:endParaRPr lang="en-US"/>
           </a:p>
@@ -1487,6 +4463,13 @@
           </p:nvPr>
         </p:nvSpPr>
         <p:spPr/>
+        <p:txBody>
+          <a:bodyPr/>
+          <a:lstStyle/>
+          <a:p>
+            <a:endParaRPr lang="en-US"/>
+          </a:p>
+        </p:txBody>
       </p:sp>
       <p:sp>
         <p:nvSpPr>
@@ -1706,7 +4689,7 @@
           <a:p>
             <a:fld id="{1160EA64-D806-43AC-9DF2-F8C432F32B4C}" type="datetimeFigureOut">
               <a:rPr lang="en-US" dirty="0"/>
-              <a:t>7/12/2026</a:t>
+              <a:t>7/13/2026</a:t>
             </a:fld>
             <a:endParaRPr lang="en-US" dirty="0"/>
           </a:p>
@@ -1872,7 +4855,7 @@
           <a:p>
             <a:fld id="{E9F9C37B-1D36-470B-8223-D6C91242EC14}" type="datetimeFigureOut">
               <a:rPr lang="en-US" dirty="0"/>
-              <a:t>7/12/2026</a:t>
+              <a:t>7/13/2026</a:t>
             </a:fld>
             <a:endParaRPr lang="en-US" dirty="0"/>
           </a:p>
@@ -2047,7 +5030,7 @@
           <a:p>
             <a:fld id="{67C6F52A-A82B-47A2-A83A-8C4C91F2D59F}" type="datetimeFigureOut">
               <a:rPr lang="en-US" dirty="0"/>
-              <a:t>7/12/2026</a:t>
+              <a:t>7/13/2026</a:t>
             </a:fld>
             <a:endParaRPr lang="en-US" dirty="0"/>
           </a:p>
@@ -2212,7 +5195,7 @@
           <a:p>
             <a:fld id="{F070A7B3-6521-4DCA-87E5-044747A908C1}" type="datetimeFigureOut">
               <a:rPr lang="en-US" dirty="0"/>
-              <a:t>7/12/2026</a:t>
+              <a:t>7/13/2026</a:t>
             </a:fld>
             <a:endParaRPr lang="en-US" dirty="0"/>
           </a:p>
@@ -2476,7 +5459,7 @@
           <a:p>
             <a:fld id="{1160EA64-D806-43AC-9DF2-F8C432F32B4C}" type="datetimeFigureOut">
               <a:rPr lang="en-US" dirty="0"/>
-              <a:t>7/12/2026</a:t>
+              <a:t>7/13/2026</a:t>
             </a:fld>
             <a:endParaRPr lang="en-US" dirty="0"/>
           </a:p>
@@ -2704,7 +5687,7 @@
           <a:p>
             <a:fld id="{AB134690-1557-4C89-A502-4959FE7FAD70}" type="datetimeFigureOut">
               <a:rPr lang="en-US" dirty="0"/>
-              <a:t>7/12/2026</a:t>
+              <a:t>7/13/2026</a:t>
             </a:fld>
             <a:endParaRPr lang="en-US" dirty="0"/>
           </a:p>
@@ -3058,7 +6041,7 @@
           <a:p>
             <a:fld id="{4F7D4976-E339-4826-83B7-FBD03F55ECF8}" type="datetimeFigureOut">
               <a:rPr lang="en-US" dirty="0"/>
-              <a:t>7/12/2026</a:t>
+              <a:t>7/13/2026</a:t>
             </a:fld>
             <a:endParaRPr lang="en-US" dirty="0"/>
           </a:p>
@@ -3194,7 +6177,7 @@
           <a:p>
             <a:fld id="{E1037C31-9E7A-4F99-8774-A0E530DE1A42}" type="datetimeFigureOut">
               <a:rPr lang="en-US" dirty="0"/>
-              <a:t>7/12/2026</a:t>
+              <a:t>7/13/2026</a:t>
             </a:fld>
             <a:endParaRPr lang="en-US" dirty="0"/>
           </a:p>
@@ -3284,7 +6267,7 @@
           <a:p>
             <a:fld id="{C278504F-A551-4DE0-9316-4DCD1D8CC752}" type="datetimeFigureOut">
               <a:rPr lang="en-US" dirty="0"/>
-              <a:t>7/12/2026</a:t>
+              <a:t>7/13/2026</a:t>
             </a:fld>
             <a:endParaRPr lang="en-US" dirty="0"/>
           </a:p>
@@ -3643,7 +6626,7 @@
           <a:p>
             <a:fld id="{D1BE4249-C0D0-4B06-8692-E8BB871AF643}" type="datetimeFigureOut">
               <a:rPr lang="en-US" dirty="0"/>
-              <a:t>7/12/2026</a:t>
+              <a:t>7/13/2026</a:t>
             </a:fld>
             <a:endParaRPr lang="en-US" dirty="0"/>
           </a:p>
@@ -4002,7 +6985,7 @@
           <a:p>
             <a:fld id="{042B0DB6-F5C7-45FB-8CF3-31B45F9C2DAC}" type="datetimeFigureOut">
               <a:rPr lang="en-US" dirty="0"/>
-              <a:t>7/12/2026</a:t>
+              <a:t>7/13/2026</a:t>
             </a:fld>
             <a:endParaRPr lang="en-US" dirty="0"/>
           </a:p>
@@ -4239,7 +7222,7 @@
           <a:p>
             <a:fld id="{1160EA64-D806-43AC-9DF2-F8C432F32B4C}" type="datetimeFigureOut">
               <a:rPr lang="en-US" dirty="0"/>
-              <a:t>7/12/2026</a:t>
+              <a:t>7/13/2026</a:t>
             </a:fld>
             <a:endParaRPr lang="en-US" dirty="0"/>
           </a:p>
@@ -7729,7 +10712,7 @@
                         <a:buNone/>
                       </a:pPr>
                       <a:r>
-                        <a:rPr lang="en-US" sz="1700" b="0" cap="none" spc="0">
+                        <a:rPr lang="en-US" sz="1700" b="0" cap="none" spc="0" dirty="0">
                           <a:solidFill>
                             <a:schemeClr val="tx1"/>
                           </a:solidFill>
@@ -7737,7 +10720,7 @@
                         </a:rPr>
                         <a:t>190.000000</a:t>
                       </a:r>
-                      <a:endParaRPr lang="en-US" sz="1700" b="0" i="0" cap="none" spc="0">
+                      <a:endParaRPr lang="en-US" sz="1700" b="0" i="0" cap="none" spc="0" dirty="0">
                         <a:solidFill>
                           <a:schemeClr val="tx1"/>
                         </a:solidFill>
@@ -7848,7 +10831,7 @@
                         <a:buNone/>
                       </a:pPr>
                       <a:r>
-                        <a:rPr lang="en-US" sz="1700" b="0" cap="none" spc="0">
+                        <a:rPr lang="en-US" sz="1700" b="0" cap="none" spc="0" dirty="0">
                           <a:solidFill>
                             <a:schemeClr val="tx1"/>
                           </a:solidFill>
@@ -7856,7 +10839,7 @@
                         </a:rPr>
                         <a:t>3.096053</a:t>
                       </a:r>
-                      <a:endParaRPr lang="en-US" sz="1700" b="0" i="0" cap="none" spc="0">
+                      <a:endParaRPr lang="en-US" sz="1700" b="0" i="0" cap="none" spc="0" dirty="0">
                         <a:solidFill>
                           <a:schemeClr val="tx1"/>
                         </a:solidFill>
@@ -9686,7 +12669,6 @@
           </a:bodyPr>
           <a:lstStyle/>
           <a:p>
-            <a:pPr algn="just"/>
             <a:r>
               <a:rPr lang="en-US" dirty="0"/>
               <a:t>Based on combining historical trend analysis, correlation analysis and the data filtering methodology, it shows that Botswana is the strongest candidate for the target development fund.</a:t>
@@ -9995,7 +12977,9 @@
           <a:bodyPr/>
           <a:lstStyle/>
           <a:p>
-            <a:pPr algn="just"/>
+            <a:pPr marL="0" indent="0" algn="just">
+              <a:buNone/>
+            </a:pPr>
             <a:r>
               <a:rPr lang="en-US" dirty="0"/>
               <a:t>High Economic growth does is not always translated into better lives. By combining historical trend analysis, correlation analysis, and applying filtration methodology, the project successfully highlighted potential </a:t>
@@ -10810,7 +13794,15 @@
           <a:p>
             <a:r>
               <a:rPr lang="en-US" dirty="0"/>
-              <a:t>GNI per Capita (Atlas Method) in USD</a:t>
+              <a:t>GNI per </a:t>
+            </a:r>
+            <a:r>
+              <a:rPr lang="en-US"/>
+              <a:t>Capita in </a:t>
+            </a:r>
+            <a:r>
+              <a:rPr lang="en-US" dirty="0"/>
+              <a:t>USD</a:t>
             </a:r>
           </a:p>
           <a:p>
@@ -11124,7 +14116,7 @@
         <p:spPr>
           <a:xfrm>
             <a:off x="1440247" y="1512454"/>
-            <a:ext cx="8779512" cy="4097390"/>
+            <a:ext cx="8779512" cy="4016476"/>
           </a:xfrm>
         </p:spPr>
         <p:txBody>
@@ -11175,109 +14167,95 @@
             </a:endParaRPr>
           </a:p>
           <a:p>
-            <a:pPr>
+            <a:pPr marL="0" indent="0">
               <a:lnSpc>
                 <a:spcPct val="90000"/>
               </a:lnSpc>
+              <a:buNone/>
             </a:pPr>
-            <a:r>
-              <a:rPr lang="en-US" sz="1500" dirty="0">
-                <a:solidFill>
-                  <a:srgbClr val="404040"/>
-                </a:solidFill>
-              </a:rPr>
-              <a:t>San Marino</a:t>
-            </a:r>
-          </a:p>
-          <a:p>
-            <a:pPr>
+            <a:endParaRPr lang="en-US" sz="1500" dirty="0">
+              <a:solidFill>
+                <a:srgbClr val="404040"/>
+              </a:solidFill>
+            </a:endParaRPr>
+          </a:p>
+          <a:p>
+            <a:pPr marL="0" indent="0">
               <a:lnSpc>
                 <a:spcPct val="90000"/>
               </a:lnSpc>
+              <a:buNone/>
             </a:pPr>
-            <a:r>
-              <a:rPr lang="en-US" sz="1500" dirty="0">
-                <a:solidFill>
-                  <a:srgbClr val="404040"/>
-                </a:solidFill>
-              </a:rPr>
-              <a:t>North Korea</a:t>
-            </a:r>
-          </a:p>
-          <a:p>
-            <a:pPr>
+            <a:endParaRPr lang="en-US" sz="1500" dirty="0">
+              <a:solidFill>
+                <a:srgbClr val="404040"/>
+              </a:solidFill>
+            </a:endParaRPr>
+          </a:p>
+          <a:p>
+            <a:pPr marL="0" indent="0">
               <a:lnSpc>
                 <a:spcPct val="90000"/>
               </a:lnSpc>
+              <a:buNone/>
             </a:pPr>
-            <a:r>
-              <a:rPr lang="en-US" sz="1500" dirty="0">
-                <a:solidFill>
-                  <a:srgbClr val="404040"/>
-                </a:solidFill>
-              </a:rPr>
-              <a:t>Monaco</a:t>
-            </a:r>
-          </a:p>
-          <a:p>
-            <a:pPr>
+            <a:endParaRPr lang="en-US" sz="1500" dirty="0">
+              <a:solidFill>
+                <a:srgbClr val="404040"/>
+              </a:solidFill>
+            </a:endParaRPr>
+          </a:p>
+          <a:p>
+            <a:pPr marL="0" indent="0">
               <a:lnSpc>
                 <a:spcPct val="90000"/>
               </a:lnSpc>
+              <a:buNone/>
             </a:pPr>
-            <a:r>
-              <a:rPr lang="en-US" sz="1500" dirty="0">
-                <a:solidFill>
-                  <a:srgbClr val="404040"/>
-                </a:solidFill>
-              </a:rPr>
-              <a:t>Holy See</a:t>
-            </a:r>
-          </a:p>
-          <a:p>
-            <a:pPr>
+            <a:endParaRPr lang="en-US" sz="1500" dirty="0">
+              <a:solidFill>
+                <a:srgbClr val="404040"/>
+              </a:solidFill>
+            </a:endParaRPr>
+          </a:p>
+          <a:p>
+            <a:pPr marL="0" indent="0">
               <a:lnSpc>
                 <a:spcPct val="90000"/>
               </a:lnSpc>
+              <a:buNone/>
             </a:pPr>
-            <a:r>
-              <a:rPr lang="en-US" sz="1500" dirty="0">
-                <a:solidFill>
-                  <a:srgbClr val="404040"/>
-                </a:solidFill>
-              </a:rPr>
-              <a:t>Taiwan</a:t>
-            </a:r>
-          </a:p>
-          <a:p>
-            <a:pPr>
+            <a:endParaRPr lang="en-US" sz="1500" dirty="0">
+              <a:solidFill>
+                <a:srgbClr val="404040"/>
+              </a:solidFill>
+            </a:endParaRPr>
+          </a:p>
+          <a:p>
+            <a:pPr marL="0" indent="0">
               <a:lnSpc>
                 <a:spcPct val="90000"/>
               </a:lnSpc>
+              <a:buNone/>
             </a:pPr>
-            <a:r>
-              <a:rPr lang="en-US" sz="1500" dirty="0">
-                <a:solidFill>
-                  <a:srgbClr val="404040"/>
-                </a:solidFill>
-              </a:rPr>
-              <a:t>Andorra</a:t>
-            </a:r>
-          </a:p>
-          <a:p>
-            <a:pPr>
+            <a:endParaRPr lang="en-US" sz="1500" dirty="0">
+              <a:solidFill>
+                <a:srgbClr val="404040"/>
+              </a:solidFill>
+            </a:endParaRPr>
+          </a:p>
+          <a:p>
+            <a:pPr marL="0" indent="0">
               <a:lnSpc>
                 <a:spcPct val="90000"/>
               </a:lnSpc>
+              <a:buNone/>
             </a:pPr>
-            <a:r>
-              <a:rPr lang="en-US" sz="1500" dirty="0">
-                <a:solidFill>
-                  <a:srgbClr val="404040"/>
-                </a:solidFill>
-              </a:rPr>
-              <a:t>Liechtenstein</a:t>
-            </a:r>
+            <a:endParaRPr lang="en-US" sz="1500" dirty="0">
+              <a:solidFill>
+                <a:srgbClr val="404040"/>
+              </a:solidFill>
+            </a:endParaRPr>
           </a:p>
           <a:p>
             <a:pPr marL="0" indent="0">
@@ -11318,14 +14296,15 @@
                   <a:srgbClr val="404040"/>
                 </a:solidFill>
               </a:rPr>
-              <a:t>Around 80% of the overall data was kept.</a:t>
+              <a:t>Around 80% of the overall data was retained.</a:t>
             </a:r>
           </a:p>
           <a:p>
-            <a:pPr>
+            <a:pPr marL="0" indent="0">
               <a:lnSpc>
                 <a:spcPct val="90000"/>
               </a:lnSpc>
+              <a:buNone/>
             </a:pPr>
             <a:endParaRPr lang="en-US" sz="1500" dirty="0">
               <a:solidFill>
@@ -11357,7 +14336,7 @@
         </p:blipFill>
         <p:spPr>
           <a:xfrm>
-            <a:off x="4454822" y="1945400"/>
+            <a:off x="4986816" y="1855465"/>
             <a:ext cx="5764937" cy="3147070"/>
           </a:xfrm>
           <a:prstGeom prst="rect">
@@ -11365,6 +14344,36 @@
           </a:prstGeom>
         </p:spPr>
       </p:pic>
+      <p:graphicFrame>
+        <p:nvGraphicFramePr>
+          <p:cNvPr id="2" name="Content Placeholder 1">
+            <a:extLst>
+              <a:ext uri="{FF2B5EF4-FFF2-40B4-BE49-F238E27FC236}">
+                <a16:creationId xmlns:a16="http://schemas.microsoft.com/office/drawing/2014/main" id="{E7495E7D-4C6F-0C43-D735-FF78F742937D}"/>
+              </a:ext>
+            </a:extLst>
+          </p:cNvPr>
+          <p:cNvGraphicFramePr>
+            <a:graphicFrameLocks/>
+          </p:cNvGraphicFramePr>
+          <p:nvPr>
+            <p:extLst>
+              <p:ext uri="{D42A27DB-BD31-4B8C-83A1-F6EECF244321}">
+                <p14:modId xmlns:p14="http://schemas.microsoft.com/office/powerpoint/2010/main" val="2408550456"/>
+              </p:ext>
+            </p:extLst>
+          </p:nvPr>
+        </p:nvGraphicFramePr>
+        <p:xfrm>
+          <a:off x="1532415" y="2146547"/>
+          <a:ext cx="2827123" cy="2855987"/>
+        </p:xfrm>
+        <a:graphic>
+          <a:graphicData uri="http://schemas.openxmlformats.org/drawingml/2006/diagram">
+            <dgm:relIds xmlns:dgm="http://schemas.openxmlformats.org/drawingml/2006/diagram" xmlns:r="http://schemas.openxmlformats.org/officeDocument/2006/relationships" r:dm="rId3" r:lo="rId4" r:qs="rId5" r:cs="rId6"/>
+          </a:graphicData>
+        </a:graphic>
+      </p:graphicFrame>
     </p:spTree>
     <p:extLst>
       <p:ext uri="{BB962C8B-B14F-4D97-AF65-F5344CB8AC3E}">
@@ -12609,6 +15618,23 @@
 </file>
 
 <file path=customXml/item1.xml><?xml version="1.0" encoding="utf-8"?>
+<p:properties xmlns:p="http://schemas.microsoft.com/office/2006/metadata/properties" xmlns:xsi="http://www.w3.org/2001/XMLSchema-instance" xmlns:pc="http://schemas.microsoft.com/office/infopath/2007/PartnerControls">
+  <documentManagement>
+    <_activity xmlns="7855343b-5261-4afc-a17c-d4c130fbaa85" xsi:nil="true"/>
+  </documentManagement>
+</p:properties>
+</file>
+
+<file path=customXml/item2.xml><?xml version="1.0" encoding="utf-8"?>
+<?mso-contentType ?>
+<FormTemplates xmlns="http://schemas.microsoft.com/sharepoint/v3/contenttype/forms">
+  <Display>DocumentLibraryForm</Display>
+  <Edit>DocumentLibraryForm</Edit>
+  <New>DocumentLibraryForm</New>
+</FormTemplates>
+</file>
+
+<file path=customXml/item3.xml><?xml version="1.0" encoding="utf-8"?>
 <ct:contentTypeSchema xmlns:ct="http://schemas.microsoft.com/office/2006/metadata/contentType" xmlns:ma="http://schemas.microsoft.com/office/2006/metadata/properties/metaAttributes" ct:_="" ma:_="" ma:contentTypeName="Document" ma:contentTypeID="0x0101000D89A625C5B6364BB7302BED22ED65DA" ma:contentTypeVersion="15" ma:contentTypeDescription="Create a new document." ma:contentTypeScope="" ma:versionID="c413f24cc048144cd399382af72d6ec5">
   <xsd:schema xmlns:xsd="http://www.w3.org/2001/XMLSchema" xmlns:xs="http://www.w3.org/2001/XMLSchema" xmlns:p="http://schemas.microsoft.com/office/2006/metadata/properties" xmlns:ns3="72f917e0-5d36-43ac-975d-26afa4cf7fc0" xmlns:ns4="7855343b-5261-4afc-a17c-d4c130fbaa85" targetNamespace="http://schemas.microsoft.com/office/2006/metadata/properties" ma:root="true" ma:fieldsID="e8c07dbcd2e466891c49150c5f39aa47" ns3:_="" ns4:_="">
     <xsd:import namespace="72f917e0-5d36-43ac-975d-26afa4cf7fc0"/>
@@ -12841,24 +15867,32 @@
 </ct:contentTypeSchema>
 </file>
 
-<file path=customXml/item2.xml><?xml version="1.0" encoding="utf-8"?>
-<?mso-contentType ?>
-<FormTemplates xmlns="http://schemas.microsoft.com/sharepoint/v3/contenttype/forms">
-  <Display>DocumentLibraryForm</Display>
-  <Edit>DocumentLibraryForm</Edit>
-  <New>DocumentLibraryForm</New>
-</FormTemplates>
+<file path=customXml/itemProps1.xml><?xml version="1.0" encoding="utf-8"?>
+<ds:datastoreItem xmlns:ds="http://schemas.openxmlformats.org/officeDocument/2006/customXml" ds:itemID="{22E6819B-A6B1-4708-9D56-A7FAC9BA6D8F}">
+  <ds:schemaRefs>
+    <ds:schemaRef ds:uri="http://schemas.microsoft.com/office/2006/metadata/properties"/>
+    <ds:schemaRef ds:uri="http://schemas.openxmlformats.org/package/2006/metadata/core-properties"/>
+    <ds:schemaRef ds:uri="http://purl.org/dc/terms/"/>
+    <ds:schemaRef ds:uri="http://www.w3.org/XML/1998/namespace"/>
+    <ds:schemaRef ds:uri="7855343b-5261-4afc-a17c-d4c130fbaa85"/>
+    <ds:schemaRef ds:uri="http://purl.org/dc/dcmitype/"/>
+    <ds:schemaRef ds:uri="http://schemas.microsoft.com/office/2006/documentManagement/types"/>
+    <ds:schemaRef ds:uri="http://schemas.microsoft.com/office/infopath/2007/PartnerControls"/>
+    <ds:schemaRef ds:uri="72f917e0-5d36-43ac-975d-26afa4cf7fc0"/>
+    <ds:schemaRef ds:uri="http://purl.org/dc/elements/1.1/"/>
+  </ds:schemaRefs>
+</ds:datastoreItem>
 </file>
 
-<file path=customXml/item3.xml><?xml version="1.0" encoding="utf-8"?>
-<p:properties xmlns:p="http://schemas.microsoft.com/office/2006/metadata/properties" xmlns:xsi="http://www.w3.org/2001/XMLSchema-instance" xmlns:pc="http://schemas.microsoft.com/office/infopath/2007/PartnerControls">
-  <documentManagement>
-    <_activity xmlns="7855343b-5261-4afc-a17c-d4c130fbaa85" xsi:nil="true"/>
-  </documentManagement>
-</p:properties>
+<file path=customXml/itemProps2.xml><?xml version="1.0" encoding="utf-8"?>
+<ds:datastoreItem xmlns:ds="http://schemas.openxmlformats.org/officeDocument/2006/customXml" ds:itemID="{24828ED2-C393-40DF-8842-234D114E8279}">
+  <ds:schemaRefs>
+    <ds:schemaRef ds:uri="http://schemas.microsoft.com/sharepoint/v3/contenttype/forms"/>
+  </ds:schemaRefs>
+</ds:datastoreItem>
 </file>
 
-<file path=customXml/itemProps1.xml><?xml version="1.0" encoding="utf-8"?>
+<file path=customXml/itemProps3.xml><?xml version="1.0" encoding="utf-8"?>
 <ds:datastoreItem xmlns:ds="http://schemas.openxmlformats.org/officeDocument/2006/customXml" ds:itemID="{7E0FB11D-9461-4416-8251-B1294B1F6A14}">
   <ds:schemaRefs>
     <ds:schemaRef ds:uri="http://schemas.microsoft.com/office/2006/metadata/contentType"/>
@@ -12877,31 +15911,6 @@
 </ds:datastoreItem>
 </file>
 
-<file path=customXml/itemProps2.xml><?xml version="1.0" encoding="utf-8"?>
-<ds:datastoreItem xmlns:ds="http://schemas.openxmlformats.org/officeDocument/2006/customXml" ds:itemID="{24828ED2-C393-40DF-8842-234D114E8279}">
-  <ds:schemaRefs>
-    <ds:schemaRef ds:uri="http://schemas.microsoft.com/sharepoint/v3/contenttype/forms"/>
-  </ds:schemaRefs>
-</ds:datastoreItem>
-</file>
-
-<file path=customXml/itemProps3.xml><?xml version="1.0" encoding="utf-8"?>
-<ds:datastoreItem xmlns:ds="http://schemas.openxmlformats.org/officeDocument/2006/customXml" ds:itemID="{22E6819B-A6B1-4708-9D56-A7FAC9BA6D8F}">
-  <ds:schemaRefs>
-    <ds:schemaRef ds:uri="http://schemas.microsoft.com/office/2006/metadata/properties"/>
-    <ds:schemaRef ds:uri="7855343b-5261-4afc-a17c-d4c130fbaa85"/>
-    <ds:schemaRef ds:uri="http://purl.org/dc/dcmitype/"/>
-    <ds:schemaRef ds:uri="http://schemas.microsoft.com/office/2006/documentManagement/types"/>
-    <ds:schemaRef ds:uri="http://purl.org/dc/elements/1.1/"/>
-    <ds:schemaRef ds:uri="http://www.w3.org/XML/1998/namespace"/>
-    <ds:schemaRef ds:uri="http://purl.org/dc/terms/"/>
-    <ds:schemaRef ds:uri="http://schemas.microsoft.com/office/infopath/2007/PartnerControls"/>
-    <ds:schemaRef ds:uri="http://schemas.openxmlformats.org/package/2006/metadata/core-properties"/>
-    <ds:schemaRef ds:uri="72f917e0-5d36-43ac-975d-26afa4cf7fc0"/>
-  </ds:schemaRefs>
-</ds:datastoreItem>
-</file>
-
 <file path=docMetadata/LabelInfo.xml><?xml version="1.0" encoding="utf-8"?>
 <clbl:labelList xmlns:clbl="http://schemas.microsoft.com/office/2020/mipLabelMetadata">
   <clbl:label id="{de069c64-97de-41b1-b6a5-363c07bccaa3}" enabled="1" method="Standard" siteId="{026137b5-e313-46d1-9b2f-026ecb50c842}" removed="0"/>
